--- a/content/general/slides/2026 Revisions/03 Requirements.pptx
+++ b/content/general/slides/2026 Revisions/03 Requirements.pptx
@@ -5,10 +5,10 @@
     <p:sldMasterId id="2147483690" r:id="rId1"/>
   </p:sldMasterIdLst>
   <p:notesMasterIdLst>
-    <p:notesMasterId r:id="rId71"/>
+    <p:notesMasterId r:id="rId72"/>
   </p:notesMasterIdLst>
   <p:handoutMasterIdLst>
-    <p:handoutMasterId r:id="rId72"/>
+    <p:handoutMasterId r:id="rId73"/>
   </p:handoutMasterIdLst>
   <p:sldIdLst>
     <p:sldId id="937" r:id="rId2"/>
@@ -68,18 +68,19 @@
     <p:sldId id="918" r:id="rId56"/>
     <p:sldId id="925" r:id="rId57"/>
     <p:sldId id="928" r:id="rId58"/>
-    <p:sldId id="927" r:id="rId59"/>
-    <p:sldId id="929" r:id="rId60"/>
-    <p:sldId id="930" r:id="rId61"/>
-    <p:sldId id="931" r:id="rId62"/>
-    <p:sldId id="932" r:id="rId63"/>
-    <p:sldId id="933" r:id="rId64"/>
-    <p:sldId id="934" r:id="rId65"/>
-    <p:sldId id="935" r:id="rId66"/>
-    <p:sldId id="936" r:id="rId67"/>
-    <p:sldId id="877" r:id="rId68"/>
-    <p:sldId id="922" r:id="rId69"/>
-    <p:sldId id="906" r:id="rId70"/>
+    <p:sldId id="938" r:id="rId59"/>
+    <p:sldId id="927" r:id="rId60"/>
+    <p:sldId id="929" r:id="rId61"/>
+    <p:sldId id="930" r:id="rId62"/>
+    <p:sldId id="931" r:id="rId63"/>
+    <p:sldId id="932" r:id="rId64"/>
+    <p:sldId id="933" r:id="rId65"/>
+    <p:sldId id="934" r:id="rId66"/>
+    <p:sldId id="935" r:id="rId67"/>
+    <p:sldId id="936" r:id="rId68"/>
+    <p:sldId id="877" r:id="rId69"/>
+    <p:sldId id="922" r:id="rId70"/>
+    <p:sldId id="906" r:id="rId71"/>
   </p:sldIdLst>
   <p:sldSz cx="12192000" cy="6858000"/>
   <p:notesSz cx="6858000" cy="9144000"/>
@@ -261,14 +262,14 @@
           <a:effectLst/>
           <a:extLst>
             <a:ext uri="{909E8E84-426E-40dd-AFC4-6F175D3DCCD1}">
-              <a14:hiddenFill xmlns:a14="http://schemas.microsoft.com/office/drawing/2010/main" xmlns="">
+              <a14:hiddenFill xmlns="" xmlns:a14="http://schemas.microsoft.com/office/drawing/2010/main">
                 <a:solidFill>
                   <a:schemeClr val="accent1"/>
                 </a:solidFill>
               </a14:hiddenFill>
             </a:ext>
             <a:ext uri="{91240B29-F687-4f45-9708-019B960494DF}">
-              <a14:hiddenLine xmlns:a14="http://schemas.microsoft.com/office/drawing/2010/main" xmlns="" w="9525">
+              <a14:hiddenLine xmlns="" xmlns:a14="http://schemas.microsoft.com/office/drawing/2010/main" w="9525">
                 <a:solidFill>
                   <a:schemeClr val="tx1"/>
                 </a:solidFill>
@@ -278,7 +279,7 @@
               </a14:hiddenLine>
             </a:ext>
             <a:ext uri="{AF507438-7753-43e0-B8FC-AC1667EBCBE1}">
-              <a14:hiddenEffects xmlns:a14="http://schemas.microsoft.com/office/drawing/2010/main" xmlns="">
+              <a14:hiddenEffects xmlns="" xmlns:a14="http://schemas.microsoft.com/office/drawing/2010/main">
                 <a:effectLst>
                   <a:outerShdw blurRad="63500" dist="38099" dir="2700000" algn="ctr" rotWithShape="0">
                     <a:schemeClr val="bg2">
@@ -289,7 +290,7 @@
               </a14:hiddenEffects>
             </a:ext>
             <a:ext uri="{FAA26D3D-D897-4be2-8F04-BA451C77F1D7}">
-              <ma14:placeholderFlag xmlns:ma14="http://schemas.microsoft.com/office/mac/drawingml/2011/main" xmlns="" val="1"/>
+              <ma14:placeholderFlag xmlns="" xmlns:ma14="http://schemas.microsoft.com/office/mac/drawingml/2011/main" val="1"/>
             </a:ext>
           </a:extLst>
         </p:spPr>
@@ -336,14 +337,14 @@
           <a:effectLst/>
           <a:extLst>
             <a:ext uri="{909E8E84-426E-40dd-AFC4-6F175D3DCCD1}">
-              <a14:hiddenFill xmlns:a14="http://schemas.microsoft.com/office/drawing/2010/main" xmlns="">
+              <a14:hiddenFill xmlns="" xmlns:a14="http://schemas.microsoft.com/office/drawing/2010/main">
                 <a:solidFill>
                   <a:schemeClr val="accent1"/>
                 </a:solidFill>
               </a14:hiddenFill>
             </a:ext>
             <a:ext uri="{91240B29-F687-4f45-9708-019B960494DF}">
-              <a14:hiddenLine xmlns:a14="http://schemas.microsoft.com/office/drawing/2010/main" xmlns="" w="9525">
+              <a14:hiddenLine xmlns="" xmlns:a14="http://schemas.microsoft.com/office/drawing/2010/main" w="9525">
                 <a:solidFill>
                   <a:schemeClr val="tx1"/>
                 </a:solidFill>
@@ -353,7 +354,7 @@
               </a14:hiddenLine>
             </a:ext>
             <a:ext uri="{AF507438-7753-43e0-B8FC-AC1667EBCBE1}">
-              <a14:hiddenEffects xmlns:a14="http://schemas.microsoft.com/office/drawing/2010/main" xmlns="">
+              <a14:hiddenEffects xmlns="" xmlns:a14="http://schemas.microsoft.com/office/drawing/2010/main">
                 <a:effectLst>
                   <a:outerShdw blurRad="63500" dist="38099" dir="2700000" algn="ctr" rotWithShape="0">
                     <a:schemeClr val="bg2">
@@ -364,7 +365,7 @@
               </a14:hiddenEffects>
             </a:ext>
             <a:ext uri="{FAA26D3D-D897-4be2-8F04-BA451C77F1D7}">
-              <ma14:placeholderFlag xmlns:ma14="http://schemas.microsoft.com/office/mac/drawingml/2011/main" xmlns="" val="1"/>
+              <ma14:placeholderFlag xmlns="" xmlns:ma14="http://schemas.microsoft.com/office/mac/drawingml/2011/main" val="1"/>
             </a:ext>
           </a:extLst>
         </p:spPr>
@@ -411,14 +412,14 @@
           <a:effectLst/>
           <a:extLst>
             <a:ext uri="{909E8E84-426E-40dd-AFC4-6F175D3DCCD1}">
-              <a14:hiddenFill xmlns:a14="http://schemas.microsoft.com/office/drawing/2010/main" xmlns="">
+              <a14:hiddenFill xmlns="" xmlns:a14="http://schemas.microsoft.com/office/drawing/2010/main">
                 <a:solidFill>
                   <a:schemeClr val="accent1"/>
                 </a:solidFill>
               </a14:hiddenFill>
             </a:ext>
             <a:ext uri="{91240B29-F687-4f45-9708-019B960494DF}">
-              <a14:hiddenLine xmlns:a14="http://schemas.microsoft.com/office/drawing/2010/main" xmlns="" w="9525">
+              <a14:hiddenLine xmlns="" xmlns:a14="http://schemas.microsoft.com/office/drawing/2010/main" w="9525">
                 <a:solidFill>
                   <a:schemeClr val="tx1"/>
                 </a:solidFill>
@@ -428,7 +429,7 @@
               </a14:hiddenLine>
             </a:ext>
             <a:ext uri="{AF507438-7753-43e0-B8FC-AC1667EBCBE1}">
-              <a14:hiddenEffects xmlns:a14="http://schemas.microsoft.com/office/drawing/2010/main" xmlns="">
+              <a14:hiddenEffects xmlns="" xmlns:a14="http://schemas.microsoft.com/office/drawing/2010/main">
                 <a:effectLst>
                   <a:outerShdw blurRad="63500" dist="38099" dir="2700000" algn="ctr" rotWithShape="0">
                     <a:schemeClr val="bg2">
@@ -439,7 +440,7 @@
               </a14:hiddenEffects>
             </a:ext>
             <a:ext uri="{FAA26D3D-D897-4be2-8F04-BA451C77F1D7}">
-              <ma14:placeholderFlag xmlns:ma14="http://schemas.microsoft.com/office/mac/drawingml/2011/main" xmlns="" val="1"/>
+              <ma14:placeholderFlag xmlns="" xmlns:ma14="http://schemas.microsoft.com/office/mac/drawingml/2011/main" val="1"/>
             </a:ext>
           </a:extLst>
         </p:spPr>
@@ -486,14 +487,14 @@
           <a:effectLst/>
           <a:extLst>
             <a:ext uri="{909E8E84-426E-40dd-AFC4-6F175D3DCCD1}">
-              <a14:hiddenFill xmlns:a14="http://schemas.microsoft.com/office/drawing/2010/main" xmlns="">
+              <a14:hiddenFill xmlns="" xmlns:a14="http://schemas.microsoft.com/office/drawing/2010/main">
                 <a:solidFill>
                   <a:schemeClr val="accent1"/>
                 </a:solidFill>
               </a14:hiddenFill>
             </a:ext>
             <a:ext uri="{91240B29-F687-4f45-9708-019B960494DF}">
-              <a14:hiddenLine xmlns:a14="http://schemas.microsoft.com/office/drawing/2010/main" xmlns="" w="9525">
+              <a14:hiddenLine xmlns="" xmlns:a14="http://schemas.microsoft.com/office/drawing/2010/main" w="9525">
                 <a:solidFill>
                   <a:schemeClr val="tx1"/>
                 </a:solidFill>
@@ -503,7 +504,7 @@
               </a14:hiddenLine>
             </a:ext>
             <a:ext uri="{AF507438-7753-43e0-B8FC-AC1667EBCBE1}">
-              <a14:hiddenEffects xmlns:a14="http://schemas.microsoft.com/office/drawing/2010/main" xmlns="">
+              <a14:hiddenEffects xmlns="" xmlns:a14="http://schemas.microsoft.com/office/drawing/2010/main">
                 <a:effectLst>
                   <a:outerShdw blurRad="63500" dist="38099" dir="2700000" algn="ctr" rotWithShape="0">
                     <a:schemeClr val="bg2">
@@ -514,7 +515,7 @@
               </a14:hiddenEffects>
             </a:ext>
             <a:ext uri="{FAA26D3D-D897-4be2-8F04-BA451C77F1D7}">
-              <ma14:placeholderFlag xmlns:ma14="http://schemas.microsoft.com/office/mac/drawingml/2011/main" xmlns="" val="1"/>
+              <ma14:placeholderFlag xmlns="" xmlns:ma14="http://schemas.microsoft.com/office/mac/drawingml/2011/main" val="1"/>
             </a:ext>
           </a:extLst>
         </p:spPr>
@@ -602,14 +603,14 @@
           <a:effectLst/>
           <a:extLst>
             <a:ext uri="{909E8E84-426E-40dd-AFC4-6F175D3DCCD1}">
-              <a14:hiddenFill xmlns:a14="http://schemas.microsoft.com/office/drawing/2010/main" xmlns="">
+              <a14:hiddenFill xmlns="" xmlns:a14="http://schemas.microsoft.com/office/drawing/2010/main">
                 <a:solidFill>
                   <a:schemeClr val="accent1"/>
                 </a:solidFill>
               </a14:hiddenFill>
             </a:ext>
             <a:ext uri="{91240B29-F687-4f45-9708-019B960494DF}">
-              <a14:hiddenLine xmlns:a14="http://schemas.microsoft.com/office/drawing/2010/main" xmlns="" w="9525">
+              <a14:hiddenLine xmlns="" xmlns:a14="http://schemas.microsoft.com/office/drawing/2010/main" w="9525">
                 <a:solidFill>
                   <a:schemeClr val="tx1"/>
                 </a:solidFill>
@@ -619,7 +620,7 @@
               </a14:hiddenLine>
             </a:ext>
             <a:ext uri="{AF507438-7753-43e0-B8FC-AC1667EBCBE1}">
-              <a14:hiddenEffects xmlns:a14="http://schemas.microsoft.com/office/drawing/2010/main" xmlns="">
+              <a14:hiddenEffects xmlns="" xmlns:a14="http://schemas.microsoft.com/office/drawing/2010/main">
                 <a:effectLst>
                   <a:outerShdw blurRad="63500" dist="38099" dir="2700000" algn="ctr" rotWithShape="0">
                     <a:schemeClr val="bg2">
@@ -630,7 +631,7 @@
               </a14:hiddenEffects>
             </a:ext>
             <a:ext uri="{FAA26D3D-D897-4be2-8F04-BA451C77F1D7}">
-              <ma14:placeholderFlag xmlns:ma14="http://schemas.microsoft.com/office/mac/drawingml/2011/main" xmlns="" val="1"/>
+              <ma14:placeholderFlag xmlns="" xmlns:ma14="http://schemas.microsoft.com/office/mac/drawingml/2011/main" val="1"/>
             </a:ext>
           </a:extLst>
         </p:spPr>
@@ -677,14 +678,14 @@
           <a:effectLst/>
           <a:extLst>
             <a:ext uri="{909E8E84-426E-40dd-AFC4-6F175D3DCCD1}">
-              <a14:hiddenFill xmlns:a14="http://schemas.microsoft.com/office/drawing/2010/main" xmlns="">
+              <a14:hiddenFill xmlns="" xmlns:a14="http://schemas.microsoft.com/office/drawing/2010/main">
                 <a:solidFill>
                   <a:schemeClr val="accent1"/>
                 </a:solidFill>
               </a14:hiddenFill>
             </a:ext>
             <a:ext uri="{91240B29-F687-4f45-9708-019B960494DF}">
-              <a14:hiddenLine xmlns:a14="http://schemas.microsoft.com/office/drawing/2010/main" xmlns="" w="9525">
+              <a14:hiddenLine xmlns="" xmlns:a14="http://schemas.microsoft.com/office/drawing/2010/main" w="9525">
                 <a:solidFill>
                   <a:schemeClr val="tx1"/>
                 </a:solidFill>
@@ -694,7 +695,7 @@
               </a14:hiddenLine>
             </a:ext>
             <a:ext uri="{AF507438-7753-43e0-B8FC-AC1667EBCBE1}">
-              <a14:hiddenEffects xmlns:a14="http://schemas.microsoft.com/office/drawing/2010/main" xmlns="">
+              <a14:hiddenEffects xmlns="" xmlns:a14="http://schemas.microsoft.com/office/drawing/2010/main">
                 <a:effectLst>
                   <a:outerShdw blurRad="63500" dist="38099" dir="2700000" algn="ctr" rotWithShape="0">
                     <a:schemeClr val="bg2">
@@ -705,7 +706,7 @@
               </a14:hiddenEffects>
             </a:ext>
             <a:ext uri="{FAA26D3D-D897-4be2-8F04-BA451C77F1D7}">
-              <ma14:placeholderFlag xmlns:ma14="http://schemas.microsoft.com/office/mac/drawingml/2011/main" xmlns="" val="1"/>
+              <ma14:placeholderFlag xmlns="" xmlns:ma14="http://schemas.microsoft.com/office/mac/drawingml/2011/main" val="1"/>
             </a:ext>
           </a:extLst>
         </p:spPr>
@@ -757,7 +758,7 @@
           <a:effectLst/>
           <a:extLst>
             <a:ext uri="{AF507438-7753-43e0-B8FC-AC1667EBCBE1}">
-              <a14:hiddenEffects xmlns:a14="http://schemas.microsoft.com/office/drawing/2010/main" xmlns="">
+              <a14:hiddenEffects xmlns="" xmlns:a14="http://schemas.microsoft.com/office/drawing/2010/main">
                 <a:effectLst>
                   <a:outerShdw blurRad="63500" dist="38099" dir="2700000" algn="ctr" rotWithShape="0">
                     <a:srgbClr val="000000">
@@ -768,7 +769,7 @@
               </a14:hiddenEffects>
             </a:ext>
             <a:ext uri="{53640926-AAD7-44d8-BBD7-CCE9431645EC}">
-              <a14:shadowObscured xmlns:a14="http://schemas.microsoft.com/office/drawing/2010/main" xmlns="" val="1"/>
+              <a14:shadowObscured xmlns="" xmlns:a14="http://schemas.microsoft.com/office/drawing/2010/main" val="1"/>
             </a:ext>
           </a:extLst>
         </p:spPr>
@@ -798,14 +799,14 @@
           <a:effectLst/>
           <a:extLst>
             <a:ext uri="{909E8E84-426E-40dd-AFC4-6F175D3DCCD1}">
-              <a14:hiddenFill xmlns:a14="http://schemas.microsoft.com/office/drawing/2010/main" xmlns="">
+              <a14:hiddenFill xmlns="" xmlns:a14="http://schemas.microsoft.com/office/drawing/2010/main">
                 <a:solidFill>
                   <a:schemeClr val="accent1"/>
                 </a:solidFill>
               </a14:hiddenFill>
             </a:ext>
             <a:ext uri="{91240B29-F687-4f45-9708-019B960494DF}">
-              <a14:hiddenLine xmlns:a14="http://schemas.microsoft.com/office/drawing/2010/main" xmlns="" w="9525">
+              <a14:hiddenLine xmlns="" xmlns:a14="http://schemas.microsoft.com/office/drawing/2010/main" w="9525">
                 <a:solidFill>
                   <a:schemeClr val="tx1"/>
                 </a:solidFill>
@@ -815,7 +816,7 @@
               </a14:hiddenLine>
             </a:ext>
             <a:ext uri="{AF507438-7753-43e0-B8FC-AC1667EBCBE1}">
-              <a14:hiddenEffects xmlns:a14="http://schemas.microsoft.com/office/drawing/2010/main" xmlns="">
+              <a14:hiddenEffects xmlns="" xmlns:a14="http://schemas.microsoft.com/office/drawing/2010/main">
                 <a:effectLst>
                   <a:outerShdw blurRad="63500" dist="38099" dir="2700000" algn="ctr" rotWithShape="0">
                     <a:schemeClr val="bg2">
@@ -826,7 +827,7 @@
               </a14:hiddenEffects>
             </a:ext>
             <a:ext uri="{FAA26D3D-D897-4be2-8F04-BA451C77F1D7}">
-              <ma14:placeholderFlag xmlns:ma14="http://schemas.microsoft.com/office/mac/drawingml/2011/main" xmlns="" val="1"/>
+              <ma14:placeholderFlag xmlns="" xmlns:ma14="http://schemas.microsoft.com/office/mac/drawingml/2011/main" val="1"/>
             </a:ext>
           </a:extLst>
         </p:spPr>
@@ -899,14 +900,14 @@
           <a:effectLst/>
           <a:extLst>
             <a:ext uri="{909E8E84-426E-40dd-AFC4-6F175D3DCCD1}">
-              <a14:hiddenFill xmlns:a14="http://schemas.microsoft.com/office/drawing/2010/main" xmlns="">
+              <a14:hiddenFill xmlns="" xmlns:a14="http://schemas.microsoft.com/office/drawing/2010/main">
                 <a:solidFill>
                   <a:schemeClr val="accent1"/>
                 </a:solidFill>
               </a14:hiddenFill>
             </a:ext>
             <a:ext uri="{91240B29-F687-4f45-9708-019B960494DF}">
-              <a14:hiddenLine xmlns:a14="http://schemas.microsoft.com/office/drawing/2010/main" xmlns="" w="9525">
+              <a14:hiddenLine xmlns="" xmlns:a14="http://schemas.microsoft.com/office/drawing/2010/main" w="9525">
                 <a:solidFill>
                   <a:schemeClr val="tx1"/>
                 </a:solidFill>
@@ -916,7 +917,7 @@
               </a14:hiddenLine>
             </a:ext>
             <a:ext uri="{AF507438-7753-43e0-B8FC-AC1667EBCBE1}">
-              <a14:hiddenEffects xmlns:a14="http://schemas.microsoft.com/office/drawing/2010/main" xmlns="">
+              <a14:hiddenEffects xmlns="" xmlns:a14="http://schemas.microsoft.com/office/drawing/2010/main">
                 <a:effectLst>
                   <a:outerShdw blurRad="63500" dist="38099" dir="2700000" algn="ctr" rotWithShape="0">
                     <a:schemeClr val="bg2">
@@ -927,7 +928,7 @@
               </a14:hiddenEffects>
             </a:ext>
             <a:ext uri="{FAA26D3D-D897-4be2-8F04-BA451C77F1D7}">
-              <ma14:placeholderFlag xmlns:ma14="http://schemas.microsoft.com/office/mac/drawingml/2011/main" xmlns="" val="1"/>
+              <ma14:placeholderFlag xmlns="" xmlns:ma14="http://schemas.microsoft.com/office/mac/drawingml/2011/main" val="1"/>
             </a:ext>
           </a:extLst>
         </p:spPr>
@@ -974,14 +975,14 @@
           <a:effectLst/>
           <a:extLst>
             <a:ext uri="{909E8E84-426E-40dd-AFC4-6F175D3DCCD1}">
-              <a14:hiddenFill xmlns:a14="http://schemas.microsoft.com/office/drawing/2010/main" xmlns="">
+              <a14:hiddenFill xmlns="" xmlns:a14="http://schemas.microsoft.com/office/drawing/2010/main">
                 <a:solidFill>
                   <a:schemeClr val="accent1"/>
                 </a:solidFill>
               </a14:hiddenFill>
             </a:ext>
             <a:ext uri="{91240B29-F687-4f45-9708-019B960494DF}">
-              <a14:hiddenLine xmlns:a14="http://schemas.microsoft.com/office/drawing/2010/main" xmlns="" w="9525">
+              <a14:hiddenLine xmlns="" xmlns:a14="http://schemas.microsoft.com/office/drawing/2010/main" w="9525">
                 <a:solidFill>
                   <a:schemeClr val="tx1"/>
                 </a:solidFill>
@@ -991,7 +992,7 @@
               </a14:hiddenLine>
             </a:ext>
             <a:ext uri="{AF507438-7753-43e0-B8FC-AC1667EBCBE1}">
-              <a14:hiddenEffects xmlns:a14="http://schemas.microsoft.com/office/drawing/2010/main" xmlns="">
+              <a14:hiddenEffects xmlns="" xmlns:a14="http://schemas.microsoft.com/office/drawing/2010/main">
                 <a:effectLst>
                   <a:outerShdw blurRad="63500" dist="38099" dir="2700000" algn="ctr" rotWithShape="0">
                     <a:schemeClr val="bg2">
@@ -1002,7 +1003,7 @@
               </a14:hiddenEffects>
             </a:ext>
             <a:ext uri="{FAA26D3D-D897-4be2-8F04-BA451C77F1D7}">
-              <ma14:placeholderFlag xmlns:ma14="http://schemas.microsoft.com/office/mac/drawingml/2011/main" xmlns="" val="1"/>
+              <ma14:placeholderFlag xmlns="" xmlns:ma14="http://schemas.microsoft.com/office/mac/drawingml/2011/main" val="1"/>
             </a:ext>
           </a:extLst>
         </p:spPr>
@@ -2282,24 +2283,21 @@
             </a:r>
           </a:p>
           <a:p>
-            <a:pPr marL="171450" indent="-171450">
-              <a:buFontTx/>
-              <a:buChar char="-"/>
-            </a:pPr>
-            <a:endParaRPr lang="en-US" baseline="0" dirty="0"/>
-          </a:p>
-          <a:p>
             <a:pPr marL="0" indent="0">
               <a:buFontTx/>
               <a:buNone/>
             </a:pPr>
             <a:r>
               <a:rPr lang="en-US" baseline="0" dirty="0"/>
-              <a:t>Example: Language learning programs versus Duolingo, which disrupted the market because it was more accessible (free), addictive, </a:t>
-            </a:r>
-            <a:r>
-              <a:rPr lang="en-US" baseline="0"/>
-              <a:t>and scalable</a:t>
+              <a:t>Example: Language learning programs (Rosetta Stone, </a:t>
+            </a:r>
+            <a:r>
+              <a:rPr lang="en-US" baseline="0" dirty="0" err="1"/>
+              <a:t>Pimsleur</a:t>
+            </a:r>
+            <a:r>
+              <a:rPr lang="en-US" baseline="0" dirty="0"/>
+              <a:t>, etc.) vs. Duolingo, which disrupted the market because it was more accessible (free), addictive, and scalable (even if it is awful for learning languages) </a:t>
             </a:r>
           </a:p>
         </p:txBody>
@@ -7796,7 +7794,13 @@
   <p:cSld>
     <p:spTree>
       <p:nvGrpSpPr>
-        <p:cNvPr id="1" name=""/>
+        <p:cNvPr id="1" name="">
+          <a:extLst>
+            <a:ext uri="{FF2B5EF4-FFF2-40B4-BE49-F238E27FC236}">
+              <a16:creationId xmlns:a16="http://schemas.microsoft.com/office/drawing/2014/main" id="{2ADBB804-4C04-27D2-FE91-FAAEE057FEFC}"/>
+            </a:ext>
+          </a:extLst>
+        </p:cNvPr>
         <p:cNvGrpSpPr/>
         <p:nvPr/>
       </p:nvGrpSpPr>
@@ -7810,7 +7814,13 @@
       </p:grpSpPr>
       <p:sp>
         <p:nvSpPr>
-          <p:cNvPr id="2" name="Slide Image Placeholder 1"/>
+          <p:cNvPr id="2" name="Slide Image Placeholder 1">
+            <a:extLst>
+              <a:ext uri="{FF2B5EF4-FFF2-40B4-BE49-F238E27FC236}">
+                <a16:creationId xmlns:a16="http://schemas.microsoft.com/office/drawing/2014/main" id="{505F7D05-CA3D-2E6D-336E-F716AD9FBD87}"/>
+              </a:ext>
+            </a:extLst>
+          </p:cNvPr>
           <p:cNvSpPr>
             <a:spLocks noGrp="1" noRot="1" noChangeAspect="1"/>
           </p:cNvSpPr>
@@ -7827,7 +7837,13 @@
       </p:sp>
       <p:sp>
         <p:nvSpPr>
-          <p:cNvPr id="3" name="Notes Placeholder 2"/>
+          <p:cNvPr id="3" name="Notes Placeholder 2">
+            <a:extLst>
+              <a:ext uri="{FF2B5EF4-FFF2-40B4-BE49-F238E27FC236}">
+                <a16:creationId xmlns:a16="http://schemas.microsoft.com/office/drawing/2014/main" id="{A540D62D-62FC-C988-2891-217A47AB2DD8}"/>
+              </a:ext>
+            </a:extLst>
+          </p:cNvPr>
           <p:cNvSpPr>
             <a:spLocks noGrp="1"/>
           </p:cNvSpPr>
@@ -7842,30 +7858,62 @@
           <a:p>
             <a:r>
               <a:rPr lang="en-US" dirty="0"/>
-              <a:t>example for setting the day</a:t>
+              <a:t>optional</a:t>
             </a:r>
             <a:r>
               <a:rPr lang="en-US" baseline="0" dirty="0"/>
-              <a:t> and month on a watch</a:t>
-            </a:r>
-          </a:p>
-          <a:p>
+              <a:t> parts</a:t>
+            </a:r>
+          </a:p>
+          <a:p>
+            <a:pPr marL="171450" indent="-171450">
+              <a:buFontTx/>
+              <a:buChar char="-"/>
+            </a:pPr>
+            <a:r>
+              <a:rPr lang="en-US" baseline="0" dirty="0"/>
+              <a:t>no guard</a:t>
+            </a:r>
+          </a:p>
+          <a:p>
+            <a:pPr marL="171450" indent="-171450">
+              <a:buFontTx/>
+              <a:buChar char="-"/>
+            </a:pPr>
+            <a:r>
+              <a:rPr lang="en-US" baseline="0" dirty="0"/>
+              <a:t>no transition effect</a:t>
+            </a:r>
+          </a:p>
+          <a:p>
+            <a:pPr marL="171450" indent="-171450">
+              <a:buFontTx/>
+              <a:buChar char="-"/>
+            </a:pPr>
             <a:endParaRPr lang="en-US" baseline="0" dirty="0"/>
           </a:p>
           <a:p>
+            <a:pPr marL="0" indent="0">
+              <a:buFontTx/>
+              <a:buNone/>
+            </a:pPr>
             <a:r>
               <a:rPr lang="en-US" baseline="0" dirty="0"/>
-              <a:t>can have composite state including a state diagram inside it</a:t>
-            </a:r>
-          </a:p>
-          <a:p>
-            <a:endParaRPr lang="en-US" baseline="0" dirty="0"/>
-          </a:p>
-        </p:txBody>
-      </p:sp>
-      <p:sp>
-        <p:nvSpPr>
-          <p:cNvPr id="4" name="Slide Number Placeholder 3"/>
+              <a:t>transitions are essentially instant</a:t>
+            </a:r>
+            <a:endParaRPr lang="en-US" dirty="0"/>
+          </a:p>
+        </p:txBody>
+      </p:sp>
+      <p:sp>
+        <p:nvSpPr>
+          <p:cNvPr id="4" name="Slide Number Placeholder 3">
+            <a:extLst>
+              <a:ext uri="{FF2B5EF4-FFF2-40B4-BE49-F238E27FC236}">
+                <a16:creationId xmlns:a16="http://schemas.microsoft.com/office/drawing/2014/main" id="{2DBA1F4D-1C77-9F60-31D5-FB036337E883}"/>
+              </a:ext>
+            </a:extLst>
+          </p:cNvPr>
           <p:cNvSpPr>
             <a:spLocks noGrp="1"/>
           </p:cNvSpPr>
@@ -7881,7 +7929,7 @@
             <a:fld id="{8ADD7956-AF07-4444-94C5-9D1D5FBA9C0F}" type="slidenum">
               <a:rPr lang="en-US" smtClean="0"/>
               <a:pPr/>
-              <a:t>59</a:t>
+              <a:t>58</a:t>
             </a:fld>
             <a:endParaRPr lang="en-US"/>
           </a:p>
@@ -7890,7 +7938,7 @@
     </p:spTree>
     <p:extLst>
       <p:ext uri="{BB962C8B-B14F-4D97-AF65-F5344CB8AC3E}">
-        <p14:creationId xmlns:p14="http://schemas.microsoft.com/office/powerpoint/2010/main" val="1502544900"/>
+        <p14:creationId xmlns:p14="http://schemas.microsoft.com/office/powerpoint/2010/main" val="1498359606"/>
       </p:ext>
     </p:extLst>
   </p:cSld>
@@ -8042,7 +8090,26 @@
           <a:bodyPr/>
           <a:lstStyle/>
           <a:p>
-            <a:endParaRPr lang="en-US" dirty="0"/>
+            <a:r>
+              <a:rPr lang="en-US" dirty="0"/>
+              <a:t>example for setting the day</a:t>
+            </a:r>
+            <a:r>
+              <a:rPr lang="en-US" baseline="0" dirty="0"/>
+              <a:t> and month on a watch</a:t>
+            </a:r>
+          </a:p>
+          <a:p>
+            <a:endParaRPr lang="en-US" baseline="0" dirty="0"/>
+          </a:p>
+          <a:p>
+            <a:r>
+              <a:rPr lang="en-US" baseline="0" dirty="0"/>
+              <a:t>can have composite state including a state diagram inside it</a:t>
+            </a:r>
+          </a:p>
+          <a:p>
+            <a:endParaRPr lang="en-US" baseline="0" dirty="0"/>
           </a:p>
         </p:txBody>
       </p:sp>
@@ -8073,7 +8140,7 @@
     </p:spTree>
     <p:extLst>
       <p:ext uri="{BB962C8B-B14F-4D97-AF65-F5344CB8AC3E}">
-        <p14:creationId xmlns:p14="http://schemas.microsoft.com/office/powerpoint/2010/main" val="1268904109"/>
+        <p14:creationId xmlns:p14="http://schemas.microsoft.com/office/powerpoint/2010/main" val="1502544900"/>
       </p:ext>
     </p:extLst>
   </p:cSld>
@@ -8132,12 +8199,6 @@
           <a:bodyPr/>
           <a:lstStyle/>
           <a:p>
-            <a:r>
-              <a:rPr lang="en-US" dirty="0"/>
-              <a:t>what states?</a:t>
-            </a:r>
-          </a:p>
-          <a:p>
             <a:endParaRPr lang="en-US" dirty="0"/>
           </a:p>
         </p:txBody>
@@ -8160,7 +8221,7 @@
             <a:fld id="{8ADD7956-AF07-4444-94C5-9D1D5FBA9C0F}" type="slidenum">
               <a:rPr lang="en-US" smtClean="0"/>
               <a:pPr/>
-              <a:t>62</a:t>
+              <a:t>61</a:t>
             </a:fld>
             <a:endParaRPr lang="en-US"/>
           </a:p>
@@ -8169,7 +8230,7 @@
     </p:spTree>
     <p:extLst>
       <p:ext uri="{BB962C8B-B14F-4D97-AF65-F5344CB8AC3E}">
-        <p14:creationId xmlns:p14="http://schemas.microsoft.com/office/powerpoint/2010/main" val="1613719560"/>
+        <p14:creationId xmlns:p14="http://schemas.microsoft.com/office/powerpoint/2010/main" val="1268904109"/>
       </p:ext>
     </p:extLst>
   </p:cSld>
@@ -8206,12 +8267,7 @@
             <p:ph type="sldImg"/>
           </p:nvPr>
         </p:nvSpPr>
-        <p:spPr>
-          <a:xfrm>
-            <a:off x="381000" y="685800"/>
-            <a:ext cx="6096000" cy="3429000"/>
-          </a:xfrm>
-        </p:spPr>
+        <p:spPr/>
       </p:sp>
       <p:sp>
         <p:nvSpPr>
@@ -8230,74 +8286,27 @@
           <a:p>
             <a:r>
               <a:rPr lang="en-US" dirty="0"/>
-              <a:t>drag is example of iteration</a:t>
-            </a:r>
-          </a:p>
-          <a:p>
-            <a:endParaRPr lang="en-US" dirty="0"/>
-          </a:p>
-          <a:p>
-            <a:r>
-              <a:rPr lang="en-US" dirty="0"/>
-              <a:t>(x, y) is</a:t>
-            </a:r>
-            <a:r>
-              <a:rPr lang="en-US" baseline="0" dirty="0"/>
-              <a:t> location of mouse</a:t>
-            </a:r>
-            <a:endParaRPr lang="en-US" dirty="0"/>
-          </a:p>
-          <a:p>
-            <a:endParaRPr lang="en-US" dirty="0"/>
-          </a:p>
-          <a:p>
-            <a:r>
-              <a:rPr lang="en-US" dirty="0"/>
-              <a:t>easier to check for incompleteness in diagram than in textual description</a:t>
-            </a:r>
-          </a:p>
-          <a:p>
-            <a:endParaRPr lang="en-US" dirty="0"/>
-          </a:p>
-          <a:p>
-            <a:r>
-              <a:rPr lang="en-US" dirty="0"/>
-              <a:t>what if user places on top of another item?</a:t>
-            </a:r>
-          </a:p>
-          <a:p>
-            <a:endParaRPr lang="en-US" dirty="0"/>
-          </a:p>
-          <a:p>
-            <a:r>
-              <a:rPr lang="en-US" dirty="0"/>
-              <a:t>states reachable?</a:t>
-            </a:r>
-          </a:p>
-          <a:p>
-            <a:r>
-              <a:rPr lang="en-US" dirty="0"/>
-              <a:t>missing</a:t>
-            </a:r>
-            <a:r>
-              <a:rPr lang="en-US" baseline="0" dirty="0"/>
-              <a:t> transitions?</a:t>
-            </a:r>
-          </a:p>
-          <a:p>
-            <a:r>
-              <a:rPr lang="en-US" baseline="0" dirty="0"/>
-              <a:t>missing events to consider?</a:t>
-            </a:r>
-            <a:endParaRPr lang="en-US" dirty="0"/>
-          </a:p>
-          <a:p>
-            <a:endParaRPr lang="en-US" dirty="0"/>
-          </a:p>
-          <a:p>
-            <a:r>
-              <a:rPr lang="en-US" dirty="0"/>
-              <a:t>getting stuck in a state</a:t>
+              <a:t>What state?</a:t>
+            </a:r>
+          </a:p>
+          <a:p>
+            <a:pPr marL="171450" indent="-171450">
+              <a:buFontTx/>
+              <a:buChar char="-"/>
+            </a:pPr>
+            <a:r>
+              <a:rPr lang="en-US" dirty="0"/>
+              <a:t>Choose an item type from the menu -&gt; system enters placing mode</a:t>
+            </a:r>
+          </a:p>
+          <a:p>
+            <a:pPr marL="171450" indent="-171450">
+              <a:buFontTx/>
+              <a:buChar char="-"/>
+            </a:pPr>
+            <a:r>
+              <a:rPr lang="en-US" dirty="0"/>
+              <a:t>Click on the canvas after selecting an item type -&gt; system returns to waiting mode</a:t>
             </a:r>
           </a:p>
         </p:txBody>
@@ -8309,7 +8318,7 @@
             <a:spLocks noGrp="1"/>
           </p:cNvSpPr>
           <p:nvPr>
-            <p:ph type="sldNum" sz="quarter" idx="10"/>
+            <p:ph type="sldNum" sz="quarter" idx="5"/>
           </p:nvPr>
         </p:nvSpPr>
         <p:spPr/>
@@ -8320,7 +8329,7 @@
             <a:fld id="{8ADD7956-AF07-4444-94C5-9D1D5FBA9C0F}" type="slidenum">
               <a:rPr lang="en-US" smtClean="0"/>
               <a:pPr/>
-              <a:t>64</a:t>
+              <a:t>62</a:t>
             </a:fld>
             <a:endParaRPr lang="en-US"/>
           </a:p>
@@ -8329,7 +8338,7 @@
     </p:spTree>
     <p:extLst>
       <p:ext uri="{BB962C8B-B14F-4D97-AF65-F5344CB8AC3E}">
-        <p14:creationId xmlns:p14="http://schemas.microsoft.com/office/powerpoint/2010/main" val="3321388962"/>
+        <p14:creationId xmlns:p14="http://schemas.microsoft.com/office/powerpoint/2010/main" val="1829963129"/>
       </p:ext>
     </p:extLst>
   </p:cSld>
@@ -8390,32 +8399,28 @@
           <a:p>
             <a:r>
               <a:rPr lang="en-US" dirty="0"/>
-              <a:t>better to find out problems early, than</a:t>
-            </a:r>
-            <a:r>
-              <a:rPr lang="en-US" baseline="0" dirty="0"/>
-              <a:t> later in testing</a:t>
-            </a:r>
-          </a:p>
-          <a:p>
-            <a:endParaRPr lang="en-US" baseline="0" dirty="0"/>
-          </a:p>
-          <a:p>
-            <a:r>
-              <a:rPr lang="en-US" baseline="0" dirty="0"/>
-              <a:t>use model checkers</a:t>
-            </a:r>
-            <a:endParaRPr lang="en-US" dirty="0"/>
-          </a:p>
-          <a:p>
-            <a:endParaRPr lang="en-US" dirty="0"/>
-          </a:p>
-          <a:p>
-            <a:pPr marL="0" indent="0">
+              <a:t>what states?</a:t>
+            </a:r>
+          </a:p>
+          <a:p>
+            <a:pPr marL="171450" indent="-171450">
               <a:buFontTx/>
-              <a:buNone/>
+              <a:buChar char="-"/>
             </a:pPr>
-            <a:endParaRPr lang="en-US" dirty="0"/>
+            <a:r>
+              <a:rPr lang="en-US" dirty="0"/>
+              <a:t>Pressing an item -&gt; moving mode</a:t>
+            </a:r>
+          </a:p>
+          <a:p>
+            <a:pPr marL="171450" indent="-171450">
+              <a:buFontTx/>
+              <a:buChar char="-"/>
+            </a:pPr>
+            <a:r>
+              <a:rPr lang="en-US" dirty="0"/>
+              <a:t>Release the mouse -&gt; return to waiting mode</a:t>
+            </a:r>
           </a:p>
         </p:txBody>
       </p:sp>
@@ -8437,7 +8442,7 @@
             <a:fld id="{8ADD7956-AF07-4444-94C5-9D1D5FBA9C0F}" type="slidenum">
               <a:rPr lang="en-US" smtClean="0"/>
               <a:pPr/>
-              <a:t>65</a:t>
+              <a:t>63</a:t>
             </a:fld>
             <a:endParaRPr lang="en-US"/>
           </a:p>
@@ -8446,7 +8451,7 @@
     </p:spTree>
     <p:extLst>
       <p:ext uri="{BB962C8B-B14F-4D97-AF65-F5344CB8AC3E}">
-        <p14:creationId xmlns:p14="http://schemas.microsoft.com/office/powerpoint/2010/main" val="659274705"/>
+        <p14:creationId xmlns:p14="http://schemas.microsoft.com/office/powerpoint/2010/main" val="1613719560"/>
       </p:ext>
     </p:extLst>
   </p:cSld>
@@ -8507,47 +8512,75 @@
           <a:p>
             <a:r>
               <a:rPr lang="en-US" dirty="0"/>
-              <a:t>reversibility</a:t>
-            </a:r>
-          </a:p>
-          <a:p>
-            <a:pPr marL="171450" indent="-171450">
-              <a:buFontTx/>
-              <a:buChar char="-"/>
-            </a:pPr>
-            <a:r>
-              <a:rPr lang="en-US" dirty="0"/>
-              <a:t>does it make sense to go back to previous states (undo)</a:t>
-            </a:r>
-          </a:p>
-          <a:p>
-            <a:pPr marL="171450" indent="-171450">
-              <a:buFontTx/>
-              <a:buChar char="-"/>
-            </a:pPr>
-            <a:r>
-              <a:rPr lang="en-US" dirty="0"/>
-              <a:t>is</a:t>
+              <a:t>drag is example of iteration</a:t>
+            </a:r>
+          </a:p>
+          <a:p>
+            <a:endParaRPr lang="en-US" dirty="0"/>
+          </a:p>
+          <a:p>
+            <a:r>
+              <a:rPr lang="en-US" dirty="0"/>
+              <a:t>(x, y) is</a:t>
             </a:r>
             <a:r>
               <a:rPr lang="en-US" baseline="0" dirty="0"/>
-              <a:t> help relevant in a state?</a:t>
+              <a:t> location of mouse</a:t>
             </a:r>
             <a:endParaRPr lang="en-US" dirty="0"/>
           </a:p>
           <a:p>
-            <a:pPr marL="0" indent="0">
-              <a:buFontTx/>
-              <a:buNone/>
-            </a:pPr>
             <a:endParaRPr lang="en-US" dirty="0"/>
           </a:p>
           <a:p>
-            <a:pPr marL="0" indent="0">
-              <a:buFontTx/>
-              <a:buNone/>
-            </a:pPr>
+            <a:r>
+              <a:rPr lang="en-US" dirty="0"/>
+              <a:t>easier to check for incompleteness in diagram than in textual description</a:t>
+            </a:r>
+          </a:p>
+          <a:p>
             <a:endParaRPr lang="en-US" dirty="0"/>
+          </a:p>
+          <a:p>
+            <a:r>
+              <a:rPr lang="en-US" dirty="0"/>
+              <a:t>what if user places on top of another item?</a:t>
+            </a:r>
+          </a:p>
+          <a:p>
+            <a:endParaRPr lang="en-US" dirty="0"/>
+          </a:p>
+          <a:p>
+            <a:r>
+              <a:rPr lang="en-US" dirty="0"/>
+              <a:t>states reachable?</a:t>
+            </a:r>
+          </a:p>
+          <a:p>
+            <a:r>
+              <a:rPr lang="en-US" dirty="0"/>
+              <a:t>missing</a:t>
+            </a:r>
+            <a:r>
+              <a:rPr lang="en-US" baseline="0" dirty="0"/>
+              <a:t> transitions?</a:t>
+            </a:r>
+          </a:p>
+          <a:p>
+            <a:r>
+              <a:rPr lang="en-US" baseline="0" dirty="0"/>
+              <a:t>missing events to consider?</a:t>
+            </a:r>
+            <a:endParaRPr lang="en-US" dirty="0"/>
+          </a:p>
+          <a:p>
+            <a:endParaRPr lang="en-US" dirty="0"/>
+          </a:p>
+          <a:p>
+            <a:r>
+              <a:rPr lang="en-US" dirty="0"/>
+              <a:t>getting stuck in a state</a:t>
+            </a:r>
           </a:p>
         </p:txBody>
       </p:sp>
@@ -8569,7 +8602,7 @@
             <a:fld id="{8ADD7956-AF07-4444-94C5-9D1D5FBA9C0F}" type="slidenum">
               <a:rPr lang="en-US" smtClean="0"/>
               <a:pPr/>
-              <a:t>66</a:t>
+              <a:t>65</a:t>
             </a:fld>
             <a:endParaRPr lang="en-US"/>
           </a:p>
@@ -8578,7 +8611,7 @@
     </p:spTree>
     <p:extLst>
       <p:ext uri="{BB962C8B-B14F-4D97-AF65-F5344CB8AC3E}">
-        <p14:creationId xmlns:p14="http://schemas.microsoft.com/office/powerpoint/2010/main" val="659274705"/>
+        <p14:creationId xmlns:p14="http://schemas.microsoft.com/office/powerpoint/2010/main" val="3321388962"/>
       </p:ext>
     </p:extLst>
   </p:cSld>
@@ -8607,6 +8640,255 @@
       </p:grpSpPr>
       <p:sp>
         <p:nvSpPr>
+          <p:cNvPr id="2" name="Slide Image Placeholder 1"/>
+          <p:cNvSpPr>
+            <a:spLocks noGrp="1" noRot="1" noChangeAspect="1"/>
+          </p:cNvSpPr>
+          <p:nvPr>
+            <p:ph type="sldImg"/>
+          </p:nvPr>
+        </p:nvSpPr>
+        <p:spPr>
+          <a:xfrm>
+            <a:off x="381000" y="685800"/>
+            <a:ext cx="6096000" cy="3429000"/>
+          </a:xfrm>
+        </p:spPr>
+      </p:sp>
+      <p:sp>
+        <p:nvSpPr>
+          <p:cNvPr id="3" name="Notes Placeholder 2"/>
+          <p:cNvSpPr>
+            <a:spLocks noGrp="1"/>
+          </p:cNvSpPr>
+          <p:nvPr>
+            <p:ph type="body" idx="1"/>
+          </p:nvPr>
+        </p:nvSpPr>
+        <p:spPr/>
+        <p:txBody>
+          <a:bodyPr/>
+          <a:lstStyle/>
+          <a:p>
+            <a:r>
+              <a:rPr lang="en-US" dirty="0"/>
+              <a:t>better to find out problems early, than</a:t>
+            </a:r>
+            <a:r>
+              <a:rPr lang="en-US" baseline="0" dirty="0"/>
+              <a:t> later in testing</a:t>
+            </a:r>
+          </a:p>
+          <a:p>
+            <a:endParaRPr lang="en-US" baseline="0" dirty="0"/>
+          </a:p>
+          <a:p>
+            <a:r>
+              <a:rPr lang="en-US" baseline="0" dirty="0"/>
+              <a:t>use model checkers</a:t>
+            </a:r>
+            <a:endParaRPr lang="en-US" dirty="0"/>
+          </a:p>
+          <a:p>
+            <a:endParaRPr lang="en-US" dirty="0"/>
+          </a:p>
+          <a:p>
+            <a:pPr marL="0" indent="0">
+              <a:buFontTx/>
+              <a:buNone/>
+            </a:pPr>
+            <a:endParaRPr lang="en-US" dirty="0"/>
+          </a:p>
+        </p:txBody>
+      </p:sp>
+      <p:sp>
+        <p:nvSpPr>
+          <p:cNvPr id="4" name="Slide Number Placeholder 3"/>
+          <p:cNvSpPr>
+            <a:spLocks noGrp="1"/>
+          </p:cNvSpPr>
+          <p:nvPr>
+            <p:ph type="sldNum" sz="quarter" idx="10"/>
+          </p:nvPr>
+        </p:nvSpPr>
+        <p:spPr/>
+        <p:txBody>
+          <a:bodyPr/>
+          <a:lstStyle/>
+          <a:p>
+            <a:fld id="{8ADD7956-AF07-4444-94C5-9D1D5FBA9C0F}" type="slidenum">
+              <a:rPr lang="en-US" smtClean="0"/>
+              <a:pPr/>
+              <a:t>66</a:t>
+            </a:fld>
+            <a:endParaRPr lang="en-US"/>
+          </a:p>
+        </p:txBody>
+      </p:sp>
+    </p:spTree>
+    <p:extLst>
+      <p:ext uri="{BB962C8B-B14F-4D97-AF65-F5344CB8AC3E}">
+        <p14:creationId xmlns:p14="http://schemas.microsoft.com/office/powerpoint/2010/main" val="659274705"/>
+      </p:ext>
+    </p:extLst>
+  </p:cSld>
+  <p:clrMapOvr>
+    <a:masterClrMapping/>
+  </p:clrMapOvr>
+</p:notes>
+</file>
+
+<file path=ppt/notesSlides/notesSlide56.xml><?xml version="1.0" encoding="utf-8"?>
+<p:notes xmlns:a="http://schemas.openxmlformats.org/drawingml/2006/main" xmlns:r="http://schemas.openxmlformats.org/officeDocument/2006/relationships" xmlns:p="http://schemas.openxmlformats.org/presentationml/2006/main">
+  <p:cSld>
+    <p:spTree>
+      <p:nvGrpSpPr>
+        <p:cNvPr id="1" name=""/>
+        <p:cNvGrpSpPr/>
+        <p:nvPr/>
+      </p:nvGrpSpPr>
+      <p:grpSpPr>
+        <a:xfrm>
+          <a:off x="0" y="0"/>
+          <a:ext cx="0" cy="0"/>
+          <a:chOff x="0" y="0"/>
+          <a:chExt cx="0" cy="0"/>
+        </a:xfrm>
+      </p:grpSpPr>
+      <p:sp>
+        <p:nvSpPr>
+          <p:cNvPr id="2" name="Slide Image Placeholder 1"/>
+          <p:cNvSpPr>
+            <a:spLocks noGrp="1" noRot="1" noChangeAspect="1"/>
+          </p:cNvSpPr>
+          <p:nvPr>
+            <p:ph type="sldImg"/>
+          </p:nvPr>
+        </p:nvSpPr>
+        <p:spPr>
+          <a:xfrm>
+            <a:off x="381000" y="685800"/>
+            <a:ext cx="6096000" cy="3429000"/>
+          </a:xfrm>
+        </p:spPr>
+      </p:sp>
+      <p:sp>
+        <p:nvSpPr>
+          <p:cNvPr id="3" name="Notes Placeholder 2"/>
+          <p:cNvSpPr>
+            <a:spLocks noGrp="1"/>
+          </p:cNvSpPr>
+          <p:nvPr>
+            <p:ph type="body" idx="1"/>
+          </p:nvPr>
+        </p:nvSpPr>
+        <p:spPr/>
+        <p:txBody>
+          <a:bodyPr/>
+          <a:lstStyle/>
+          <a:p>
+            <a:r>
+              <a:rPr lang="en-US" dirty="0"/>
+              <a:t>reversibility</a:t>
+            </a:r>
+          </a:p>
+          <a:p>
+            <a:pPr marL="171450" indent="-171450">
+              <a:buFontTx/>
+              <a:buChar char="-"/>
+            </a:pPr>
+            <a:r>
+              <a:rPr lang="en-US" dirty="0"/>
+              <a:t>does it make sense to go back to previous states (undo)</a:t>
+            </a:r>
+          </a:p>
+          <a:p>
+            <a:pPr marL="171450" indent="-171450">
+              <a:buFontTx/>
+              <a:buChar char="-"/>
+            </a:pPr>
+            <a:r>
+              <a:rPr lang="en-US" dirty="0"/>
+              <a:t>is</a:t>
+            </a:r>
+            <a:r>
+              <a:rPr lang="en-US" baseline="0" dirty="0"/>
+              <a:t> help relevant in a state?</a:t>
+            </a:r>
+            <a:endParaRPr lang="en-US" dirty="0"/>
+          </a:p>
+          <a:p>
+            <a:pPr marL="0" indent="0">
+              <a:buFontTx/>
+              <a:buNone/>
+            </a:pPr>
+            <a:endParaRPr lang="en-US" dirty="0"/>
+          </a:p>
+          <a:p>
+            <a:pPr marL="0" indent="0">
+              <a:buFontTx/>
+              <a:buNone/>
+            </a:pPr>
+            <a:endParaRPr lang="en-US" dirty="0"/>
+          </a:p>
+        </p:txBody>
+      </p:sp>
+      <p:sp>
+        <p:nvSpPr>
+          <p:cNvPr id="4" name="Slide Number Placeholder 3"/>
+          <p:cNvSpPr>
+            <a:spLocks noGrp="1"/>
+          </p:cNvSpPr>
+          <p:nvPr>
+            <p:ph type="sldNum" sz="quarter" idx="10"/>
+          </p:nvPr>
+        </p:nvSpPr>
+        <p:spPr/>
+        <p:txBody>
+          <a:bodyPr/>
+          <a:lstStyle/>
+          <a:p>
+            <a:fld id="{8ADD7956-AF07-4444-94C5-9D1D5FBA9C0F}" type="slidenum">
+              <a:rPr lang="en-US" smtClean="0"/>
+              <a:pPr/>
+              <a:t>67</a:t>
+            </a:fld>
+            <a:endParaRPr lang="en-US"/>
+          </a:p>
+        </p:txBody>
+      </p:sp>
+    </p:spTree>
+    <p:extLst>
+      <p:ext uri="{BB962C8B-B14F-4D97-AF65-F5344CB8AC3E}">
+        <p14:creationId xmlns:p14="http://schemas.microsoft.com/office/powerpoint/2010/main" val="659274705"/>
+      </p:ext>
+    </p:extLst>
+  </p:cSld>
+  <p:clrMapOvr>
+    <a:masterClrMapping/>
+  </p:clrMapOvr>
+</p:notes>
+</file>
+
+<file path=ppt/notesSlides/notesSlide57.xml><?xml version="1.0" encoding="utf-8"?>
+<p:notes xmlns:a="http://schemas.openxmlformats.org/drawingml/2006/main" xmlns:r="http://schemas.openxmlformats.org/officeDocument/2006/relationships" xmlns:p="http://schemas.openxmlformats.org/presentationml/2006/main">
+  <p:cSld>
+    <p:spTree>
+      <p:nvGrpSpPr>
+        <p:cNvPr id="1" name=""/>
+        <p:cNvGrpSpPr/>
+        <p:nvPr/>
+      </p:nvGrpSpPr>
+      <p:grpSpPr>
+        <a:xfrm>
+          <a:off x="0" y="0"/>
+          <a:ext cx="0" cy="0"/>
+          <a:chOff x="0" y="0"/>
+          <a:chExt cx="0" cy="0"/>
+        </a:xfrm>
+      </p:grpSpPr>
+      <p:sp>
+        <p:nvSpPr>
           <p:cNvPr id="7" name="Rectangle 7"/>
           <p:cNvSpPr>
             <a:spLocks noGrp="1" noChangeArrowheads="1"/>
@@ -8625,7 +8907,7 @@
             <a:fld id="{F0280EE6-4668-8F48-AA6C-297873FB6A42}" type="slidenum">
               <a:rPr lang="en-US"/>
               <a:pPr/>
-              <a:t>68</a:t>
+              <a:t>69</a:t>
             </a:fld>
             <a:endParaRPr lang="en-US"/>
           </a:p>
@@ -8649,7 +8931,7 @@
           <a:ln/>
           <a:extLst>
             <a:ext uri="{FAA26D3D-D897-4be2-8F04-BA451C77F1D7}">
-              <ma14:placeholderFlag xmlns:ma14="http://schemas.microsoft.com/office/mac/drawingml/2011/main" xmlns="" val="1"/>
+              <ma14:placeholderFlag xmlns="" xmlns:ma14="http://schemas.microsoft.com/office/mac/drawingml/2011/main" val="1"/>
             </a:ext>
           </a:extLst>
         </p:spPr>
@@ -12153,8 +12435,12 @@
               </a:lnSpc>
             </a:pPr>
             <a:r>
+              <a:rPr lang="en-US" sz="1800"/>
+              <a:t>  hindle1</a:t>
+            </a:r>
+            <a:r>
               <a:rPr lang="en-US" sz="1800" dirty="0"/>
-              <a:t>hindle1@ualberta.ca</a:t>
+              <a:t>@ualberta.ca</a:t>
             </a:r>
             <a:r>
               <a:rPr lang="en-US" sz="1800" dirty="0">
@@ -13235,7 +13521,7 @@
         <p:spPr>
           <a:xfrm>
             <a:off x="838200" y="1825624"/>
-            <a:ext cx="10515600" cy="4530725"/>
+            <a:ext cx="10515600" cy="4667251"/>
           </a:xfrm>
         </p:spPr>
         <p:txBody>
@@ -15655,7 +15941,7 @@
             <a:pPr lvl="2"/>
             <a:r>
               <a:rPr lang="en-US" dirty="0"/>
-              <a:t>Discuss with the user what they find of most value, and stage development on that first</a:t>
+              <a:t>Discuss with the user what they find of most value and stage development on that first</a:t>
             </a:r>
           </a:p>
           <a:p>
@@ -17832,7 +18118,7 @@
             <a:pPr lvl="1"/>
             <a:r>
               <a:rPr lang="en-US" dirty="0"/>
-              <a:t>“I want to track the calories for a meal, so I consult the USDA Nutrient database. I want to look up ‘Pacific salmon’ so I enter that as the keywords. Item not found! So I enter ‘salmon’ and try again. That works, but I get 46 items, including salmonberries and even cloudberries. Why? I choose ‘fish, salmon, sockeye, cooked, dry heat’, then figure 2.5 x 100 g units for my item, and scan the table to see 422 kcal in the energy row.”</a:t>
+              <a:t>“I want to track the calories for a meal, so I consult the USDA Nutrient database. I want to look up ‘Pacific salmon’ so I enter that as the keywords. Item not found! So, I enter ‘salmon’ and try again. That works, but I get 46 items, including salmonberries and even cloudberries. Why? I choose ‘fish, salmon, sockeye, cooked, dry heat’, then figure 2.5 x 100 g units for my item and scan the table to see 422 kcal in the energy row.”</a:t>
             </a:r>
           </a:p>
         </p:txBody>
@@ -21281,7 +21567,7 @@
           <p:nvPr>
             <p:extLst>
               <p:ext uri="{D42A27DB-BD31-4B8C-83A1-F6EECF244321}">
-                <p14:modId xmlns:p14="http://schemas.microsoft.com/office/powerpoint/2010/main" val="3850486849"/>
+                <p14:modId xmlns:p14="http://schemas.microsoft.com/office/powerpoint/2010/main" val="1791813633"/>
               </p:ext>
             </p:extLst>
           </p:nvPr>
@@ -25227,6 +25513,47 @@
             <a:r>
               <a:rPr lang="en-US" dirty="0"/>
               <a:t>Used in formally modeling the behavior of a specific object in response to external events</a:t>
+            </a:r>
+          </a:p>
+          <a:p>
+            <a:pPr lvl="1"/>
+            <a:r>
+              <a:rPr lang="en-US" dirty="0"/>
+              <a:t>Describe how an object changes over time</a:t>
+            </a:r>
+          </a:p>
+          <a:p>
+            <a:pPr lvl="1"/>
+            <a:r>
+              <a:rPr lang="en-US" dirty="0"/>
+              <a:t>Show how behavior depends on the object’s current state</a:t>
+            </a:r>
+          </a:p>
+          <a:p>
+            <a:r>
+              <a:rPr lang="en-US" dirty="0"/>
+              <a:t>Common use:</a:t>
+            </a:r>
+          </a:p>
+          <a:p>
+            <a:pPr lvl="1"/>
+            <a:r>
+              <a:rPr lang="en-US" dirty="0"/>
+              <a:t>User interface modes</a:t>
+            </a:r>
+          </a:p>
+          <a:p>
+            <a:pPr lvl="1"/>
+            <a:r>
+              <a:rPr lang="en-US" dirty="0"/>
+              <a:t>Workflows</a:t>
+            </a:r>
+          </a:p>
+          <a:p>
+            <a:pPr lvl="1"/>
+            <a:r>
+              <a:rPr lang="en-US" dirty="0"/>
+              <a:t>Objects with lifecycles</a:t>
             </a:r>
           </a:p>
         </p:txBody>
@@ -27870,14 +28197,14 @@
             <a:pPr lvl="1"/>
             <a:r>
               <a:rPr lang="en-US" dirty="0"/>
-              <a:t>If in a current state,</a:t>
+              <a:t>If in the current state, </a:t>
             </a:r>
             <a:br>
               <a:rPr lang="en-US" dirty="0"/>
             </a:br>
             <a:r>
               <a:rPr lang="en-US" dirty="0"/>
-              <a:t>and </a:t>
+              <a:t>and the </a:t>
             </a:r>
             <a:r>
               <a:rPr lang="en-US" i="1" dirty="0"/>
@@ -27892,7 +28219,7 @@
             </a:br>
             <a:r>
               <a:rPr lang="en-US" dirty="0"/>
-              <a:t>and </a:t>
+              <a:t>and the </a:t>
             </a:r>
             <a:r>
               <a:rPr lang="en-US" i="1" dirty="0"/>
@@ -27907,14 +28234,21 @@
             <a:pPr lvl="1"/>
             <a:r>
               <a:rPr lang="en-US" dirty="0"/>
-              <a:t>Then perform state exit actions (if any),</a:t>
-            </a:r>
-            <a:br>
-              <a:rPr lang="en-US" dirty="0"/>
-            </a:br>
-            <a:r>
-              <a:rPr lang="en-US" dirty="0"/>
-              <a:t>perform corresponding transition </a:t>
+              <a:t>Then, the object:</a:t>
+            </a:r>
+          </a:p>
+          <a:p>
+            <a:pPr lvl="2"/>
+            <a:r>
+              <a:rPr lang="en-US" dirty="0"/>
+              <a:t>Performs state exit actions (if any)</a:t>
+            </a:r>
+          </a:p>
+          <a:p>
+            <a:pPr lvl="2"/>
+            <a:r>
+              <a:rPr lang="en-US" dirty="0"/>
+              <a:t>Performs the transition </a:t>
             </a:r>
             <a:r>
               <a:rPr lang="en-US" i="1" dirty="0"/>
@@ -27922,14 +28256,14 @@
             </a:r>
             <a:r>
               <a:rPr lang="en-US" dirty="0"/>
-              <a:t> (if any),</a:t>
-            </a:r>
-            <a:br>
-              <a:rPr lang="en-US" dirty="0"/>
-            </a:br>
-            <a:r>
-              <a:rPr lang="en-US" dirty="0"/>
-              <a:t>perform new state entry actions (if any);</a:t>
+              <a:t> (if any)</a:t>
+            </a:r>
+          </a:p>
+          <a:p>
+            <a:pPr lvl="2"/>
+            <a:r>
+              <a:rPr lang="en-US" dirty="0"/>
+              <a:t>Performs new state entry actions (if any)</a:t>
             </a:r>
           </a:p>
           <a:p>
@@ -28108,6 +28442,488 @@
 </file>
 
 <file path=ppt/slides/slide58.xml><?xml version="1.0" encoding="utf-8"?>
+<p:sld xmlns:a="http://schemas.openxmlformats.org/drawingml/2006/main" xmlns:r="http://schemas.openxmlformats.org/officeDocument/2006/relationships" xmlns:p="http://schemas.openxmlformats.org/presentationml/2006/main" show="0">
+  <p:cSld>
+    <p:spTree>
+      <p:nvGrpSpPr>
+        <p:cNvPr id="1" name="">
+          <a:extLst>
+            <a:ext uri="{FF2B5EF4-FFF2-40B4-BE49-F238E27FC236}">
+              <a16:creationId xmlns:a16="http://schemas.microsoft.com/office/drawing/2014/main" id="{8261E361-9DEC-117F-AC00-802239FDE782}"/>
+            </a:ext>
+          </a:extLst>
+        </p:cNvPr>
+        <p:cNvGrpSpPr/>
+        <p:nvPr/>
+      </p:nvGrpSpPr>
+      <p:grpSpPr>
+        <a:xfrm>
+          <a:off x="0" y="0"/>
+          <a:ext cx="0" cy="0"/>
+          <a:chOff x="0" y="0"/>
+          <a:chExt cx="0" cy="0"/>
+        </a:xfrm>
+      </p:grpSpPr>
+      <p:sp>
+        <p:nvSpPr>
+          <p:cNvPr id="7" name="Content Placeholder 22">
+            <a:extLst>
+              <a:ext uri="{FF2B5EF4-FFF2-40B4-BE49-F238E27FC236}">
+                <a16:creationId xmlns:a16="http://schemas.microsoft.com/office/drawing/2014/main" id="{33DA95BB-4C4C-FAAA-695C-AB378C5110B6}"/>
+              </a:ext>
+            </a:extLst>
+          </p:cNvPr>
+          <p:cNvSpPr txBox="1">
+            <a:spLocks/>
+          </p:cNvSpPr>
+          <p:nvPr/>
+        </p:nvSpPr>
+        <p:spPr>
+          <a:xfrm>
+            <a:off x="838200" y="1825625"/>
+            <a:ext cx="10515600" cy="4351338"/>
+          </a:xfrm>
+          <a:prstGeom prst="rect">
+            <a:avLst/>
+          </a:prstGeom>
+        </p:spPr>
+        <p:txBody>
+          <a:bodyPr vert="horz" lIns="91440" tIns="45720" rIns="91440" bIns="45720" rtlCol="0">
+            <a:normAutofit/>
+          </a:bodyPr>
+          <a:lstStyle>
+            <a:lvl1pPr marL="228600" indent="-228600" algn="l" defTabSz="914400" rtl="0" eaLnBrk="1" latinLnBrk="0" hangingPunct="1">
+              <a:lnSpc>
+                <a:spcPct val="90000"/>
+              </a:lnSpc>
+              <a:spcBef>
+                <a:spcPts val="1000"/>
+              </a:spcBef>
+              <a:buFont typeface="Arial" panose="020B0604020202020204" pitchFamily="34" charset="0"/>
+              <a:buChar char="•"/>
+              <a:defRPr sz="2800" kern="1200">
+                <a:solidFill>
+                  <a:schemeClr val="tx1"/>
+                </a:solidFill>
+                <a:latin typeface="+mn-lt"/>
+                <a:ea typeface="+mn-ea"/>
+                <a:cs typeface="+mn-cs"/>
+              </a:defRPr>
+            </a:lvl1pPr>
+            <a:lvl2pPr marL="685800" indent="-228600" algn="l" defTabSz="914400" rtl="0" eaLnBrk="1" latinLnBrk="0" hangingPunct="1">
+              <a:lnSpc>
+                <a:spcPct val="90000"/>
+              </a:lnSpc>
+              <a:spcBef>
+                <a:spcPts val="500"/>
+              </a:spcBef>
+              <a:buFont typeface="Arial" panose="020B0604020202020204" pitchFamily="34" charset="0"/>
+              <a:buChar char="•"/>
+              <a:defRPr sz="2400" kern="1200">
+                <a:solidFill>
+                  <a:schemeClr val="tx1"/>
+                </a:solidFill>
+                <a:latin typeface="+mn-lt"/>
+                <a:ea typeface="+mn-ea"/>
+                <a:cs typeface="+mn-cs"/>
+              </a:defRPr>
+            </a:lvl2pPr>
+            <a:lvl3pPr marL="1143000" indent="-228600" algn="l" defTabSz="914400" rtl="0" eaLnBrk="1" latinLnBrk="0" hangingPunct="1">
+              <a:lnSpc>
+                <a:spcPct val="90000"/>
+              </a:lnSpc>
+              <a:spcBef>
+                <a:spcPts val="500"/>
+              </a:spcBef>
+              <a:buFont typeface="Arial" panose="020B0604020202020204" pitchFamily="34" charset="0"/>
+              <a:buChar char="•"/>
+              <a:defRPr sz="2000" kern="1200">
+                <a:solidFill>
+                  <a:schemeClr val="tx1"/>
+                </a:solidFill>
+                <a:latin typeface="+mn-lt"/>
+                <a:ea typeface="+mn-ea"/>
+                <a:cs typeface="+mn-cs"/>
+              </a:defRPr>
+            </a:lvl3pPr>
+            <a:lvl4pPr marL="1600200" indent="-228600" algn="l" defTabSz="914400" rtl="0" eaLnBrk="1" latinLnBrk="0" hangingPunct="1">
+              <a:lnSpc>
+                <a:spcPct val="90000"/>
+              </a:lnSpc>
+              <a:spcBef>
+                <a:spcPts val="500"/>
+              </a:spcBef>
+              <a:buFont typeface="Arial" panose="020B0604020202020204" pitchFamily="34" charset="0"/>
+              <a:buChar char="•"/>
+              <a:defRPr sz="1800" kern="1200">
+                <a:solidFill>
+                  <a:schemeClr val="tx1"/>
+                </a:solidFill>
+                <a:latin typeface="+mn-lt"/>
+                <a:ea typeface="+mn-ea"/>
+                <a:cs typeface="+mn-cs"/>
+              </a:defRPr>
+            </a:lvl4pPr>
+            <a:lvl5pPr marL="2057400" indent="-228600" algn="l" defTabSz="914400" rtl="0" eaLnBrk="1" latinLnBrk="0" hangingPunct="1">
+              <a:lnSpc>
+                <a:spcPct val="90000"/>
+              </a:lnSpc>
+              <a:spcBef>
+                <a:spcPts val="500"/>
+              </a:spcBef>
+              <a:buFont typeface="Arial" panose="020B0604020202020204" pitchFamily="34" charset="0"/>
+              <a:buChar char="•"/>
+              <a:defRPr sz="1800" kern="1200">
+                <a:solidFill>
+                  <a:schemeClr val="tx1"/>
+                </a:solidFill>
+                <a:latin typeface="+mn-lt"/>
+                <a:ea typeface="+mn-ea"/>
+                <a:cs typeface="+mn-cs"/>
+              </a:defRPr>
+            </a:lvl5pPr>
+            <a:lvl6pPr marL="2514600" indent="-228600" algn="l" defTabSz="914400" rtl="0" eaLnBrk="1" latinLnBrk="0" hangingPunct="1">
+              <a:lnSpc>
+                <a:spcPct val="90000"/>
+              </a:lnSpc>
+              <a:spcBef>
+                <a:spcPts val="500"/>
+              </a:spcBef>
+              <a:buFont typeface="Arial" panose="020B0604020202020204" pitchFamily="34" charset="0"/>
+              <a:buChar char="•"/>
+              <a:defRPr sz="1800" kern="1200">
+                <a:solidFill>
+                  <a:schemeClr val="tx1"/>
+                </a:solidFill>
+                <a:latin typeface="+mn-lt"/>
+                <a:ea typeface="+mn-ea"/>
+                <a:cs typeface="+mn-cs"/>
+              </a:defRPr>
+            </a:lvl6pPr>
+            <a:lvl7pPr marL="2971800" indent="-228600" algn="l" defTabSz="914400" rtl="0" eaLnBrk="1" latinLnBrk="0" hangingPunct="1">
+              <a:lnSpc>
+                <a:spcPct val="90000"/>
+              </a:lnSpc>
+              <a:spcBef>
+                <a:spcPts val="500"/>
+              </a:spcBef>
+              <a:buFont typeface="Arial" panose="020B0604020202020204" pitchFamily="34" charset="0"/>
+              <a:buChar char="•"/>
+              <a:defRPr sz="1800" kern="1200">
+                <a:solidFill>
+                  <a:schemeClr val="tx1"/>
+                </a:solidFill>
+                <a:latin typeface="+mn-lt"/>
+                <a:ea typeface="+mn-ea"/>
+                <a:cs typeface="+mn-cs"/>
+              </a:defRPr>
+            </a:lvl7pPr>
+            <a:lvl8pPr marL="3429000" indent="-228600" algn="l" defTabSz="914400" rtl="0" eaLnBrk="1" latinLnBrk="0" hangingPunct="1">
+              <a:lnSpc>
+                <a:spcPct val="90000"/>
+              </a:lnSpc>
+              <a:spcBef>
+                <a:spcPts val="500"/>
+              </a:spcBef>
+              <a:buFont typeface="Arial" panose="020B0604020202020204" pitchFamily="34" charset="0"/>
+              <a:buChar char="•"/>
+              <a:defRPr sz="1800" kern="1200">
+                <a:solidFill>
+                  <a:schemeClr val="tx1"/>
+                </a:solidFill>
+                <a:latin typeface="+mn-lt"/>
+                <a:ea typeface="+mn-ea"/>
+                <a:cs typeface="+mn-cs"/>
+              </a:defRPr>
+            </a:lvl8pPr>
+            <a:lvl9pPr marL="3886200" indent="-228600" algn="l" defTabSz="914400" rtl="0" eaLnBrk="1" latinLnBrk="0" hangingPunct="1">
+              <a:lnSpc>
+                <a:spcPct val="90000"/>
+              </a:lnSpc>
+              <a:spcBef>
+                <a:spcPts val="500"/>
+              </a:spcBef>
+              <a:buFont typeface="Arial" panose="020B0604020202020204" pitchFamily="34" charset="0"/>
+              <a:buChar char="•"/>
+              <a:defRPr sz="1800" kern="1200">
+                <a:solidFill>
+                  <a:schemeClr val="tx1"/>
+                </a:solidFill>
+                <a:latin typeface="+mn-lt"/>
+                <a:ea typeface="+mn-ea"/>
+                <a:cs typeface="+mn-cs"/>
+              </a:defRPr>
+            </a:lvl9pPr>
+          </a:lstStyle>
+          <a:p>
+            <a:r>
+              <a:rPr lang="en-US" dirty="0"/>
+              <a:t>Transitions:</a:t>
+            </a:r>
+          </a:p>
+          <a:p>
+            <a:endParaRPr lang="en-US" dirty="0"/>
+          </a:p>
+          <a:p>
+            <a:pPr lvl="1"/>
+            <a:r>
+              <a:rPr lang="en-US" dirty="0"/>
+              <a:t>If in a current state,</a:t>
+            </a:r>
+            <a:br>
+              <a:rPr lang="en-US" dirty="0"/>
+            </a:br>
+            <a:r>
+              <a:rPr lang="en-US" dirty="0"/>
+              <a:t>and </a:t>
+            </a:r>
+            <a:r>
+              <a:rPr lang="en-US" i="1" dirty="0"/>
+              <a:t>trigger</a:t>
+            </a:r>
+            <a:r>
+              <a:rPr lang="en-US" dirty="0"/>
+              <a:t> occurs,</a:t>
+            </a:r>
+            <a:br>
+              <a:rPr lang="en-US" dirty="0"/>
+            </a:br>
+            <a:r>
+              <a:rPr lang="en-US" dirty="0"/>
+              <a:t>and </a:t>
+            </a:r>
+            <a:r>
+              <a:rPr lang="en-US" i="1" dirty="0"/>
+              <a:t>guard</a:t>
+            </a:r>
+            <a:r>
+              <a:rPr lang="en-US" dirty="0"/>
+              <a:t> constraint (if any) is true …</a:t>
+            </a:r>
+          </a:p>
+          <a:p>
+            <a:pPr lvl="1"/>
+            <a:r>
+              <a:rPr lang="en-US" dirty="0"/>
+              <a:t>Then perform state exit actions (if any),</a:t>
+            </a:r>
+            <a:br>
+              <a:rPr lang="en-US" dirty="0"/>
+            </a:br>
+            <a:r>
+              <a:rPr lang="en-US" dirty="0"/>
+              <a:t>perform corresponding transition </a:t>
+            </a:r>
+            <a:r>
+              <a:rPr lang="en-US" i="1" dirty="0"/>
+              <a:t>effect</a:t>
+            </a:r>
+            <a:r>
+              <a:rPr lang="en-US" dirty="0"/>
+              <a:t> (if any),</a:t>
+            </a:r>
+            <a:br>
+              <a:rPr lang="en-US" dirty="0"/>
+            </a:br>
+            <a:r>
+              <a:rPr lang="en-US" dirty="0"/>
+              <a:t>perform new state entry actions (if any);</a:t>
+            </a:r>
+          </a:p>
+          <a:p>
+            <a:pPr lvl="1"/>
+            <a:r>
+              <a:rPr lang="en-US" dirty="0"/>
+              <a:t>Otherwise, stay at current state.</a:t>
+            </a:r>
+          </a:p>
+        </p:txBody>
+      </p:sp>
+      <p:sp>
+        <p:nvSpPr>
+          <p:cNvPr id="2" name="Title 1">
+            <a:extLst>
+              <a:ext uri="{FF2B5EF4-FFF2-40B4-BE49-F238E27FC236}">
+                <a16:creationId xmlns:a16="http://schemas.microsoft.com/office/drawing/2014/main" id="{B30DD248-D74E-0BF6-61C6-EC513C2C3348}"/>
+              </a:ext>
+            </a:extLst>
+          </p:cNvPr>
+          <p:cNvSpPr>
+            <a:spLocks noGrp="1"/>
+          </p:cNvSpPr>
+          <p:nvPr>
+            <p:ph type="title"/>
+          </p:nvPr>
+        </p:nvSpPr>
+        <p:spPr/>
+        <p:txBody>
+          <a:bodyPr/>
+          <a:lstStyle/>
+          <a:p>
+            <a:r>
+              <a:rPr lang="en-US" dirty="0"/>
+              <a:t>UML State Diagram</a:t>
+            </a:r>
+          </a:p>
+        </p:txBody>
+      </p:sp>
+      <p:sp>
+        <p:nvSpPr>
+          <p:cNvPr id="4" name="Slide Number Placeholder 3">
+            <a:extLst>
+              <a:ext uri="{FF2B5EF4-FFF2-40B4-BE49-F238E27FC236}">
+                <a16:creationId xmlns:a16="http://schemas.microsoft.com/office/drawing/2014/main" id="{668A0ED5-8919-E954-6A17-FE0F406EE058}"/>
+              </a:ext>
+            </a:extLst>
+          </p:cNvPr>
+          <p:cNvSpPr>
+            <a:spLocks noGrp="1"/>
+          </p:cNvSpPr>
+          <p:nvPr>
+            <p:ph type="sldNum" sz="quarter" idx="12"/>
+          </p:nvPr>
+        </p:nvSpPr>
+        <p:spPr/>
+        <p:txBody>
+          <a:bodyPr/>
+          <a:lstStyle/>
+          <a:p>
+            <a:fld id="{CADD82E7-7C10-744D-AD9E-31500693C936}" type="slidenum">
+              <a:rPr lang="en-US" smtClean="0"/>
+              <a:pPr/>
+              <a:t>58</a:t>
+            </a:fld>
+            <a:endParaRPr lang="en-US"/>
+          </a:p>
+        </p:txBody>
+      </p:sp>
+      <p:graphicFrame>
+        <p:nvGraphicFramePr>
+          <p:cNvPr id="5" name="Table 4">
+            <a:extLst>
+              <a:ext uri="{FF2B5EF4-FFF2-40B4-BE49-F238E27FC236}">
+                <a16:creationId xmlns:a16="http://schemas.microsoft.com/office/drawing/2014/main" id="{E6A1C77F-4BC3-D382-31AA-8F76D351BF92}"/>
+              </a:ext>
+            </a:extLst>
+          </p:cNvPr>
+          <p:cNvGraphicFramePr>
+            <a:graphicFrameLocks noGrp="1"/>
+          </p:cNvGraphicFramePr>
+          <p:nvPr/>
+        </p:nvGraphicFramePr>
+        <p:xfrm>
+          <a:off x="1199456" y="2312680"/>
+          <a:ext cx="2664296" cy="396240"/>
+        </p:xfrm>
+        <a:graphic>
+          <a:graphicData uri="http://schemas.openxmlformats.org/drawingml/2006/table">
+            <a:tbl>
+              <a:tblPr firstRow="1" bandRow="1">
+                <a:tableStyleId>{5940675A-B579-460E-94D1-54222C63F5DA}</a:tableStyleId>
+              </a:tblPr>
+              <a:tblGrid>
+                <a:gridCol w="2664296">
+                  <a:extLst>
+                    <a:ext uri="{9D8B030D-6E8A-4147-A177-3AD203B41FA5}">
+                      <a16:colId xmlns:a16="http://schemas.microsoft.com/office/drawing/2014/main" val="20000"/>
+                    </a:ext>
+                  </a:extLst>
+                </a:gridCol>
+              </a:tblGrid>
+              <a:tr h="370840">
+                <a:tc>
+                  <a:txBody>
+                    <a:bodyPr/>
+                    <a:lstStyle/>
+                    <a:p>
+                      <a:r>
+                        <a:rPr lang="en-US" sz="2000" i="1" dirty="0"/>
+                        <a:t>trigger</a:t>
+                      </a:r>
+                      <a:r>
+                        <a:rPr lang="en-US" sz="2000" dirty="0"/>
+                        <a:t> [ </a:t>
+                      </a:r>
+                      <a:r>
+                        <a:rPr lang="en-US" sz="2000" i="1" dirty="0"/>
+                        <a:t>guard</a:t>
+                      </a:r>
+                      <a:r>
+                        <a:rPr lang="en-US" sz="2000" dirty="0"/>
+                        <a:t> ] </a:t>
+                      </a:r>
+                      <a:r>
+                        <a:rPr lang="en-US" sz="2000" baseline="0" dirty="0"/>
+                        <a:t>/ </a:t>
+                      </a:r>
+                      <a:r>
+                        <a:rPr lang="en-US" sz="2000" i="1" baseline="0" dirty="0"/>
+                        <a:t>effect</a:t>
+                      </a:r>
+                      <a:endParaRPr lang="en-US" sz="2000" i="1" dirty="0"/>
+                    </a:p>
+                  </a:txBody>
+                  <a:tcPr/>
+                </a:tc>
+                <a:extLst>
+                  <a:ext uri="{0D108BD9-81ED-4DB2-BD59-A6C34878D82A}">
+                    <a16:rowId xmlns:a16="http://schemas.microsoft.com/office/drawing/2014/main" val="10000"/>
+                  </a:ext>
+                </a:extLst>
+              </a:tr>
+            </a:tbl>
+          </a:graphicData>
+        </a:graphic>
+      </p:graphicFrame>
+      <p:sp>
+        <p:nvSpPr>
+          <p:cNvPr id="6" name="TextBox 5">
+            <a:extLst>
+              <a:ext uri="{FF2B5EF4-FFF2-40B4-BE49-F238E27FC236}">
+                <a16:creationId xmlns:a16="http://schemas.microsoft.com/office/drawing/2014/main" id="{002748A2-A520-F3BE-E671-4E471E988FDC}"/>
+              </a:ext>
+            </a:extLst>
+          </p:cNvPr>
+          <p:cNvSpPr txBox="1"/>
+          <p:nvPr/>
+        </p:nvSpPr>
+        <p:spPr>
+          <a:xfrm>
+            <a:off x="4211418" y="2326134"/>
+            <a:ext cx="3158237" cy="369332"/>
+          </a:xfrm>
+          <a:prstGeom prst="rect">
+            <a:avLst/>
+          </a:prstGeom>
+          <a:noFill/>
+        </p:spPr>
+        <p:txBody>
+          <a:bodyPr wrap="none" rtlCol="0">
+            <a:spAutoFit/>
+          </a:bodyPr>
+          <a:lstStyle/>
+          <a:p>
+            <a:r>
+              <a:rPr lang="en-US" dirty="0"/>
+              <a:t>General form of transition label</a:t>
+            </a:r>
+          </a:p>
+        </p:txBody>
+      </p:sp>
+    </p:spTree>
+    <p:extLst>
+      <p:ext uri="{BB962C8B-B14F-4D97-AF65-F5344CB8AC3E}">
+        <p14:creationId xmlns:p14="http://schemas.microsoft.com/office/powerpoint/2010/main" val="1477697346"/>
+      </p:ext>
+    </p:extLst>
+  </p:cSld>
+  <p:clrMapOvr>
+    <a:masterClrMapping/>
+  </p:clrMapOvr>
+</p:sld>
+</file>
+
+<file path=ppt/slides/slide59.xml><?xml version="1.0" encoding="utf-8"?>
 <p:sld xmlns:a="http://schemas.openxmlformats.org/drawingml/2006/main" xmlns:r="http://schemas.openxmlformats.org/officeDocument/2006/relationships" xmlns:p="http://schemas.openxmlformats.org/presentationml/2006/main">
   <p:cSld>
     <p:spTree>
@@ -28189,7 +29005,7 @@
             <a:fld id="{CADD82E7-7C10-744D-AD9E-31500693C936}" type="slidenum">
               <a:rPr lang="en-US" smtClean="0"/>
               <a:pPr/>
-              <a:t>58</a:t>
+              <a:t>59</a:t>
             </a:fld>
             <a:endParaRPr lang="en-US"/>
           </a:p>
@@ -28772,7 +29588,7 @@
 </p:sld>
 </file>
 
-<file path=ppt/slides/slide59.xml><?xml version="1.0" encoding="utf-8"?>
+<file path=ppt/slides/slide6.xml><?xml version="1.0" encoding="utf-8"?>
 <p:sld xmlns:a="http://schemas.openxmlformats.org/drawingml/2006/main" xmlns:r="http://schemas.openxmlformats.org/officeDocument/2006/relationships" xmlns:p="http://schemas.openxmlformats.org/presentationml/2006/main">
   <p:cSld>
     <p:spTree>
@@ -28806,14 +29622,14 @@
           <a:p>
             <a:r>
               <a:rPr lang="en-US" dirty="0"/>
-              <a:t>UML State Diagram</a:t>
-            </a:r>
-          </a:p>
-        </p:txBody>
-      </p:sp>
-      <p:sp>
-        <p:nvSpPr>
-          <p:cNvPr id="23" name="Content Placeholder 22"/>
+              <a:t>Requirements</a:t>
+            </a:r>
+          </a:p>
+        </p:txBody>
+      </p:sp>
+      <p:sp>
+        <p:nvSpPr>
+          <p:cNvPr id="3" name="Content Placeholder 2"/>
           <p:cNvSpPr>
             <a:spLocks noGrp="1"/>
           </p:cNvSpPr>
@@ -28828,11 +29644,43 @@
           <a:p>
             <a:r>
               <a:rPr lang="en-US" dirty="0"/>
-              <a:t>Activities in states:</a:t>
-            </a:r>
-          </a:p>
-          <a:p>
-            <a:endParaRPr lang="en-US" dirty="0"/>
+              <a:t>Types:</a:t>
+            </a:r>
+          </a:p>
+          <a:p>
+            <a:pPr lvl="1"/>
+            <a:r>
+              <a:rPr lang="en-US" dirty="0"/>
+              <a:t>Business requirements</a:t>
+            </a:r>
+          </a:p>
+          <a:p>
+            <a:pPr lvl="2"/>
+            <a:r>
+              <a:rPr lang="en-US" dirty="0"/>
+              <a:t>Why the system is needed</a:t>
+            </a:r>
+          </a:p>
+          <a:p>
+            <a:pPr lvl="1"/>
+            <a:r>
+              <a:rPr lang="en-US" dirty="0"/>
+              <a:t>Business constraint</a:t>
+            </a:r>
+          </a:p>
+          <a:p>
+            <a:pPr lvl="2"/>
+            <a:r>
+              <a:rPr lang="en-US" dirty="0"/>
+              <a:t>What the system or process must comply with</a:t>
+            </a:r>
+          </a:p>
+          <a:p>
+            <a:pPr lvl="2"/>
+            <a:r>
+              <a:rPr lang="en-US" dirty="0"/>
+              <a:t>E.g., corporate policy, industry standard, government regulation </a:t>
+            </a:r>
           </a:p>
         </p:txBody>
       </p:sp>
@@ -28854,7 +29702,108 @@
             <a:fld id="{CADD82E7-7C10-744D-AD9E-31500693C936}" type="slidenum">
               <a:rPr lang="en-US" smtClean="0"/>
               <a:pPr/>
-              <a:t>59</a:t>
+              <a:t>6</a:t>
+            </a:fld>
+            <a:endParaRPr lang="en-US"/>
+          </a:p>
+        </p:txBody>
+      </p:sp>
+    </p:spTree>
+    <p:extLst>
+      <p:ext uri="{BB962C8B-B14F-4D97-AF65-F5344CB8AC3E}">
+        <p14:creationId xmlns:p14="http://schemas.microsoft.com/office/powerpoint/2010/main" val="2276566787"/>
+      </p:ext>
+    </p:extLst>
+  </p:cSld>
+  <p:clrMapOvr>
+    <a:masterClrMapping/>
+  </p:clrMapOvr>
+</p:sld>
+</file>
+
+<file path=ppt/slides/slide60.xml><?xml version="1.0" encoding="utf-8"?>
+<p:sld xmlns:a="http://schemas.openxmlformats.org/drawingml/2006/main" xmlns:r="http://schemas.openxmlformats.org/officeDocument/2006/relationships" xmlns:p="http://schemas.openxmlformats.org/presentationml/2006/main">
+  <p:cSld>
+    <p:spTree>
+      <p:nvGrpSpPr>
+        <p:cNvPr id="1" name=""/>
+        <p:cNvGrpSpPr/>
+        <p:nvPr/>
+      </p:nvGrpSpPr>
+      <p:grpSpPr>
+        <a:xfrm>
+          <a:off x="0" y="0"/>
+          <a:ext cx="0" cy="0"/>
+          <a:chOff x="0" y="0"/>
+          <a:chExt cx="0" cy="0"/>
+        </a:xfrm>
+      </p:grpSpPr>
+      <p:sp>
+        <p:nvSpPr>
+          <p:cNvPr id="2" name="Title 1"/>
+          <p:cNvSpPr>
+            <a:spLocks noGrp="1"/>
+          </p:cNvSpPr>
+          <p:nvPr>
+            <p:ph type="title"/>
+          </p:nvPr>
+        </p:nvSpPr>
+        <p:spPr/>
+        <p:txBody>
+          <a:bodyPr/>
+          <a:lstStyle/>
+          <a:p>
+            <a:r>
+              <a:rPr lang="en-US" dirty="0"/>
+              <a:t>UML State Diagram</a:t>
+            </a:r>
+          </a:p>
+        </p:txBody>
+      </p:sp>
+      <p:sp>
+        <p:nvSpPr>
+          <p:cNvPr id="23" name="Content Placeholder 22"/>
+          <p:cNvSpPr>
+            <a:spLocks noGrp="1"/>
+          </p:cNvSpPr>
+          <p:nvPr>
+            <p:ph idx="1"/>
+          </p:nvPr>
+        </p:nvSpPr>
+        <p:spPr/>
+        <p:txBody>
+          <a:bodyPr/>
+          <a:lstStyle/>
+          <a:p>
+            <a:r>
+              <a:rPr lang="en-US" dirty="0"/>
+              <a:t>Activities in states:</a:t>
+            </a:r>
+          </a:p>
+          <a:p>
+            <a:endParaRPr lang="en-US" dirty="0"/>
+          </a:p>
+        </p:txBody>
+      </p:sp>
+      <p:sp>
+        <p:nvSpPr>
+          <p:cNvPr id="4" name="Slide Number Placeholder 3"/>
+          <p:cNvSpPr>
+            <a:spLocks noGrp="1"/>
+          </p:cNvSpPr>
+          <p:nvPr>
+            <p:ph type="sldNum" sz="quarter" idx="12"/>
+          </p:nvPr>
+        </p:nvSpPr>
+        <p:spPr/>
+        <p:txBody>
+          <a:bodyPr/>
+          <a:lstStyle/>
+          <a:p>
+            <a:fld id="{CADD82E7-7C10-744D-AD9E-31500693C936}" type="slidenum">
+              <a:rPr lang="en-US" smtClean="0"/>
+              <a:pPr/>
+              <a:t>60</a:t>
             </a:fld>
             <a:endParaRPr lang="en-US"/>
           </a:p>
@@ -28962,7 +29911,7 @@
             </a:br>
             <a:r>
               <a:rPr lang="en-US" dirty="0"/>
-              <a:t> start day blink</a:t>
+              <a:t>  start day blink</a:t>
             </a:r>
           </a:p>
           <a:p>
@@ -28975,7 +29924,7 @@
             </a:br>
             <a:r>
               <a:rPr lang="en-US" dirty="0"/>
-              <a:t> increment day</a:t>
+              <a:t>  increment day</a:t>
             </a:r>
             <a:br>
               <a:rPr lang="en-US" dirty="0"/>
@@ -28989,7 +29938,7 @@
             </a:br>
             <a:r>
               <a:rPr lang="en-US" dirty="0"/>
-              <a:t> stop day blink</a:t>
+              <a:t>  stop day blink</a:t>
             </a:r>
           </a:p>
         </p:txBody>
@@ -29127,7 +30076,7 @@
             </a:br>
             <a:r>
               <a:rPr lang="en-US" dirty="0"/>
-              <a:t> start month blink</a:t>
+              <a:t>  start month blink</a:t>
             </a:r>
           </a:p>
           <a:p>
@@ -29140,7 +30089,7 @@
             </a:br>
             <a:r>
               <a:rPr lang="en-US" dirty="0"/>
-              <a:t> increment month</a:t>
+              <a:t>  increment month</a:t>
             </a:r>
           </a:p>
           <a:p>
@@ -29152,7 +30101,7 @@
           <a:p>
             <a:r>
               <a:rPr lang="en-US" dirty="0"/>
-              <a:t> stop month blink</a:t>
+              <a:t>  stop month blink</a:t>
             </a:r>
           </a:p>
         </p:txBody>
@@ -29535,7 +30484,7 @@
         </p:nvSpPr>
         <p:spPr>
           <a:xfrm>
-            <a:off x="8112224" y="1412776"/>
+            <a:off x="7500156" y="1489202"/>
             <a:ext cx="1944216" cy="646331"/>
           </a:xfrm>
           <a:prstGeom prst="rect">
@@ -29569,7 +30518,7 @@
 </p:sld>
 </file>
 
-<file path=ppt/slides/slide6.xml><?xml version="1.0" encoding="utf-8"?>
+<file path=ppt/slides/slide61.xml><?xml version="1.0" encoding="utf-8"?>
 <p:sld xmlns:a="http://schemas.openxmlformats.org/drawingml/2006/main" xmlns:r="http://schemas.openxmlformats.org/officeDocument/2006/relationships" xmlns:p="http://schemas.openxmlformats.org/presentationml/2006/main">
   <p:cSld>
     <p:spTree>
@@ -29603,7 +30552,7 @@
           <a:p>
             <a:r>
               <a:rPr lang="en-US" dirty="0"/>
-              <a:t>Requirements</a:t>
+              <a:t>Room Planner</a:t>
             </a:r>
           </a:p>
         </p:txBody>
@@ -29625,42 +30574,47 @@
           <a:p>
             <a:r>
               <a:rPr lang="en-US" dirty="0"/>
-              <a:t>Types:</a:t>
+              <a:t>Canvas:</a:t>
             </a:r>
           </a:p>
           <a:p>
             <a:pPr lvl="1"/>
             <a:r>
               <a:rPr lang="en-US" dirty="0"/>
-              <a:t>Business requirements</a:t>
-            </a:r>
-          </a:p>
-          <a:p>
-            <a:pPr lvl="2"/>
-            <a:r>
-              <a:rPr lang="en-US" dirty="0"/>
-              <a:t>Why the system is needed</a:t>
+              <a:t>Place and move items</a:t>
+            </a:r>
+          </a:p>
+          <a:p>
+            <a:r>
+              <a:rPr lang="en-US" dirty="0"/>
+              <a:t>Mouse events:</a:t>
             </a:r>
           </a:p>
           <a:p>
             <a:pPr lvl="1"/>
             <a:r>
               <a:rPr lang="en-US" dirty="0"/>
-              <a:t>Business constraint</a:t>
-            </a:r>
-          </a:p>
-          <a:p>
-            <a:pPr lvl="2"/>
-            <a:r>
-              <a:rPr lang="en-US" dirty="0"/>
-              <a:t>What the system or process must comply with</a:t>
-            </a:r>
-          </a:p>
-          <a:p>
-            <a:pPr lvl="2"/>
-            <a:r>
-              <a:rPr lang="en-US" dirty="0"/>
-              <a:t>E.g., corporate policy, industry standard, government regulation </a:t>
+              <a:t>Click</a:t>
+            </a:r>
+          </a:p>
+          <a:p>
+            <a:pPr lvl="1"/>
+            <a:r>
+              <a:rPr lang="en-US" dirty="0"/>
+              <a:t>Press / drag / release</a:t>
+            </a:r>
+          </a:p>
+          <a:p>
+            <a:r>
+              <a:rPr lang="en-US" dirty="0"/>
+              <a:t>Item type menu:</a:t>
+            </a:r>
+          </a:p>
+          <a:p>
+            <a:pPr lvl="1"/>
+            <a:r>
+              <a:rPr lang="en-US" dirty="0"/>
+              <a:t>Choices of fixtures and furniture</a:t>
             </a:r>
           </a:p>
         </p:txBody>
@@ -29683,145 +30637,7 @@
             <a:fld id="{CADD82E7-7C10-744D-AD9E-31500693C936}" type="slidenum">
               <a:rPr lang="en-US" smtClean="0"/>
               <a:pPr/>
-              <a:t>6</a:t>
-            </a:fld>
-            <a:endParaRPr lang="en-US"/>
-          </a:p>
-        </p:txBody>
-      </p:sp>
-    </p:spTree>
-    <p:extLst>
-      <p:ext uri="{BB962C8B-B14F-4D97-AF65-F5344CB8AC3E}">
-        <p14:creationId xmlns:p14="http://schemas.microsoft.com/office/powerpoint/2010/main" val="2276566787"/>
-      </p:ext>
-    </p:extLst>
-  </p:cSld>
-  <p:clrMapOvr>
-    <a:masterClrMapping/>
-  </p:clrMapOvr>
-</p:sld>
-</file>
-
-<file path=ppt/slides/slide60.xml><?xml version="1.0" encoding="utf-8"?>
-<p:sld xmlns:a="http://schemas.openxmlformats.org/drawingml/2006/main" xmlns:r="http://schemas.openxmlformats.org/officeDocument/2006/relationships" xmlns:p="http://schemas.openxmlformats.org/presentationml/2006/main">
-  <p:cSld>
-    <p:spTree>
-      <p:nvGrpSpPr>
-        <p:cNvPr id="1" name=""/>
-        <p:cNvGrpSpPr/>
-        <p:nvPr/>
-      </p:nvGrpSpPr>
-      <p:grpSpPr>
-        <a:xfrm>
-          <a:off x="0" y="0"/>
-          <a:ext cx="0" cy="0"/>
-          <a:chOff x="0" y="0"/>
-          <a:chExt cx="0" cy="0"/>
-        </a:xfrm>
-      </p:grpSpPr>
-      <p:sp>
-        <p:nvSpPr>
-          <p:cNvPr id="2" name="Title 1"/>
-          <p:cNvSpPr>
-            <a:spLocks noGrp="1"/>
-          </p:cNvSpPr>
-          <p:nvPr>
-            <p:ph type="title"/>
-          </p:nvPr>
-        </p:nvSpPr>
-        <p:spPr/>
-        <p:txBody>
-          <a:bodyPr/>
-          <a:lstStyle/>
-          <a:p>
-            <a:r>
-              <a:rPr lang="en-US" dirty="0"/>
-              <a:t>Room Planner</a:t>
-            </a:r>
-          </a:p>
-        </p:txBody>
-      </p:sp>
-      <p:sp>
-        <p:nvSpPr>
-          <p:cNvPr id="3" name="Content Placeholder 2"/>
-          <p:cNvSpPr>
-            <a:spLocks noGrp="1"/>
-          </p:cNvSpPr>
-          <p:nvPr>
-            <p:ph idx="1"/>
-          </p:nvPr>
-        </p:nvSpPr>
-        <p:spPr/>
-        <p:txBody>
-          <a:bodyPr/>
-          <a:lstStyle/>
-          <a:p>
-            <a:r>
-              <a:rPr lang="en-US" dirty="0"/>
-              <a:t>Canvas:</a:t>
-            </a:r>
-          </a:p>
-          <a:p>
-            <a:pPr lvl="1"/>
-            <a:r>
-              <a:rPr lang="en-US" dirty="0"/>
-              <a:t>To place and move items</a:t>
-            </a:r>
-          </a:p>
-          <a:p>
-            <a:r>
-              <a:rPr lang="en-US" dirty="0"/>
-              <a:t>Mouse events:</a:t>
-            </a:r>
-          </a:p>
-          <a:p>
-            <a:pPr lvl="1"/>
-            <a:r>
-              <a:rPr lang="en-US" dirty="0"/>
-              <a:t>Click</a:t>
-            </a:r>
-          </a:p>
-          <a:p>
-            <a:pPr lvl="1"/>
-            <a:r>
-              <a:rPr lang="en-US" dirty="0"/>
-              <a:t>Press/drag/release</a:t>
-            </a:r>
-          </a:p>
-          <a:p>
-            <a:r>
-              <a:rPr lang="en-US" dirty="0"/>
-              <a:t>Item type menu:</a:t>
-            </a:r>
-          </a:p>
-          <a:p>
-            <a:pPr lvl="1"/>
-            <a:r>
-              <a:rPr lang="en-US" dirty="0"/>
-              <a:t>Choices of fixtures and furniture</a:t>
-            </a:r>
-          </a:p>
-        </p:txBody>
-      </p:sp>
-      <p:sp>
-        <p:nvSpPr>
-          <p:cNvPr id="4" name="Slide Number Placeholder 3"/>
-          <p:cNvSpPr>
-            <a:spLocks noGrp="1"/>
-          </p:cNvSpPr>
-          <p:nvPr>
-            <p:ph type="sldNum" sz="quarter" idx="12"/>
-          </p:nvPr>
-        </p:nvSpPr>
-        <p:spPr/>
-        <p:txBody>
-          <a:bodyPr/>
-          <a:lstStyle/>
-          <a:p>
-            <a:fld id="{CADD82E7-7C10-744D-AD9E-31500693C936}" type="slidenum">
-              <a:rPr lang="en-US" smtClean="0"/>
-              <a:pPr/>
-              <a:t>60</a:t>
+              <a:t>61</a:t>
             </a:fld>
             <a:endParaRPr lang="en-US"/>
           </a:p>
@@ -30322,146 +31138,6 @@
 </p:sld>
 </file>
 
-<file path=ppt/slides/slide61.xml><?xml version="1.0" encoding="utf-8"?>
-<p:sld xmlns:a="http://schemas.openxmlformats.org/drawingml/2006/main" xmlns:r="http://schemas.openxmlformats.org/officeDocument/2006/relationships" xmlns:p="http://schemas.openxmlformats.org/presentationml/2006/main">
-  <p:cSld>
-    <p:spTree>
-      <p:nvGrpSpPr>
-        <p:cNvPr id="1" name=""/>
-        <p:cNvGrpSpPr/>
-        <p:nvPr/>
-      </p:nvGrpSpPr>
-      <p:grpSpPr>
-        <a:xfrm>
-          <a:off x="0" y="0"/>
-          <a:ext cx="0" cy="0"/>
-          <a:chOff x="0" y="0"/>
-          <a:chExt cx="0" cy="0"/>
-        </a:xfrm>
-      </p:grpSpPr>
-      <p:sp>
-        <p:nvSpPr>
-          <p:cNvPr id="2" name="Title 1"/>
-          <p:cNvSpPr>
-            <a:spLocks noGrp="1"/>
-          </p:cNvSpPr>
-          <p:nvPr>
-            <p:ph type="title"/>
-          </p:nvPr>
-        </p:nvSpPr>
-        <p:spPr/>
-        <p:txBody>
-          <a:bodyPr/>
-          <a:lstStyle/>
-          <a:p>
-            <a:r>
-              <a:rPr lang="en-US" dirty="0"/>
-              <a:t>Room Planner</a:t>
-            </a:r>
-          </a:p>
-        </p:txBody>
-      </p:sp>
-      <p:sp>
-        <p:nvSpPr>
-          <p:cNvPr id="3" name="Content Placeholder 2"/>
-          <p:cNvSpPr>
-            <a:spLocks noGrp="1"/>
-          </p:cNvSpPr>
-          <p:nvPr>
-            <p:ph idx="1"/>
-          </p:nvPr>
-        </p:nvSpPr>
-        <p:spPr/>
-        <p:txBody>
-          <a:bodyPr/>
-          <a:lstStyle/>
-          <a:p>
-            <a:r>
-              <a:rPr lang="en-US" dirty="0"/>
-              <a:t>Placing an item:</a:t>
-            </a:r>
-          </a:p>
-          <a:p>
-            <a:pPr lvl="1"/>
-            <a:r>
-              <a:rPr lang="en-US" dirty="0"/>
-              <a:t>User clicks on canvas outside any item</a:t>
-            </a:r>
-          </a:p>
-          <a:p>
-            <a:pPr lvl="2"/>
-            <a:r>
-              <a:rPr lang="en-US" dirty="0"/>
-              <a:t>System shows the item type menu</a:t>
-            </a:r>
-          </a:p>
-          <a:p>
-            <a:pPr lvl="1"/>
-            <a:r>
-              <a:rPr lang="en-US" dirty="0"/>
-              <a:t>User chooses an item type from the menu</a:t>
-            </a:r>
-          </a:p>
-          <a:p>
-            <a:pPr lvl="2"/>
-            <a:r>
-              <a:rPr lang="en-US" dirty="0"/>
-              <a:t>System hides the item type menu</a:t>
-            </a:r>
-          </a:p>
-          <a:p>
-            <a:pPr lvl="1"/>
-            <a:r>
-              <a:rPr lang="en-US" dirty="0"/>
-              <a:t>User clicks on the canvas</a:t>
-            </a:r>
-          </a:p>
-          <a:p>
-            <a:pPr lvl="2"/>
-            <a:r>
-              <a:rPr lang="en-US" dirty="0"/>
-              <a:t>System draws item of the chosen type at the mouse location</a:t>
-            </a:r>
-          </a:p>
-        </p:txBody>
-      </p:sp>
-      <p:sp>
-        <p:nvSpPr>
-          <p:cNvPr id="4" name="Slide Number Placeholder 3"/>
-          <p:cNvSpPr>
-            <a:spLocks noGrp="1"/>
-          </p:cNvSpPr>
-          <p:nvPr>
-            <p:ph type="sldNum" sz="quarter" idx="12"/>
-          </p:nvPr>
-        </p:nvSpPr>
-        <p:spPr/>
-        <p:txBody>
-          <a:bodyPr/>
-          <a:lstStyle/>
-          <a:p>
-            <a:fld id="{CADD82E7-7C10-744D-AD9E-31500693C936}" type="slidenum">
-              <a:rPr lang="en-US" smtClean="0"/>
-              <a:pPr/>
-              <a:t>61</a:t>
-            </a:fld>
-            <a:endParaRPr lang="en-US"/>
-          </a:p>
-        </p:txBody>
-      </p:sp>
-    </p:spTree>
-    <p:extLst>
-      <p:ext uri="{BB962C8B-B14F-4D97-AF65-F5344CB8AC3E}">
-        <p14:creationId xmlns:p14="http://schemas.microsoft.com/office/powerpoint/2010/main" val="3440067458"/>
-      </p:ext>
-    </p:extLst>
-  </p:cSld>
-  <p:clrMapOvr>
-    <a:masterClrMapping/>
-  </p:clrMapOvr>
-</p:sld>
-</file>
-
 <file path=ppt/slides/slide62.xml><?xml version="1.0" encoding="utf-8"?>
 <p:sld xmlns:a="http://schemas.openxmlformats.org/drawingml/2006/main" xmlns:r="http://schemas.openxmlformats.org/officeDocument/2006/relationships" xmlns:p="http://schemas.openxmlformats.org/presentationml/2006/main">
   <p:cSld>
@@ -30518,56 +31194,49 @@
           <a:p>
             <a:r>
               <a:rPr lang="en-US" dirty="0"/>
-              <a:t>Moving an item:</a:t>
+              <a:t>Placing an item:</a:t>
             </a:r>
           </a:p>
           <a:p>
             <a:pPr lvl="1"/>
             <a:r>
               <a:rPr lang="en-US" dirty="0"/>
-              <a:t>User presses inside an item</a:t>
+              <a:t>User clicks on empty space on the canvas</a:t>
             </a:r>
           </a:p>
           <a:p>
             <a:pPr lvl="2"/>
             <a:r>
               <a:rPr lang="en-US" dirty="0"/>
-              <a:t>System highlights item</a:t>
+              <a:t>System shows the item type menu</a:t>
             </a:r>
           </a:p>
           <a:p>
             <a:pPr lvl="1"/>
             <a:r>
               <a:rPr lang="en-US" dirty="0"/>
-              <a:t>User drags item</a:t>
+              <a:t>User chooses an item type from the menu</a:t>
             </a:r>
           </a:p>
           <a:p>
             <a:pPr lvl="2"/>
             <a:r>
               <a:rPr lang="en-US" dirty="0"/>
-              <a:t>System shows moving item</a:t>
+              <a:t>System hides the item type menu</a:t>
             </a:r>
           </a:p>
           <a:p>
             <a:pPr lvl="1"/>
             <a:r>
               <a:rPr lang="en-US" dirty="0"/>
-              <a:t>User releases mouse</a:t>
+              <a:t>User clicks on the canvas</a:t>
             </a:r>
           </a:p>
           <a:p>
             <a:pPr lvl="2"/>
             <a:r>
               <a:rPr lang="en-US" dirty="0"/>
-              <a:t>System puts item at new location</a:t>
-            </a:r>
-          </a:p>
-          <a:p>
-            <a:pPr lvl="2"/>
-            <a:r>
-              <a:rPr lang="en-US" dirty="0"/>
-              <a:t>System removes item highlighting</a:t>
+              <a:t>System draws item of the chosen type at the mouse location</a:t>
             </a:r>
           </a:p>
         </p:txBody>
@@ -30599,7 +31268,7 @@
     </p:spTree>
     <p:extLst>
       <p:ext uri="{BB962C8B-B14F-4D97-AF65-F5344CB8AC3E}">
-        <p14:creationId xmlns:p14="http://schemas.microsoft.com/office/powerpoint/2010/main" val="4055572376"/>
+        <p14:creationId xmlns:p14="http://schemas.microsoft.com/office/powerpoint/2010/main" val="3440067458"/>
       </p:ext>
     </p:extLst>
   </p:cSld>
@@ -30665,72 +31334,57 @@
           <a:p>
             <a:r>
               <a:rPr lang="en-US" dirty="0"/>
-              <a:t>States:</a:t>
+              <a:t>Moving an item:</a:t>
             </a:r>
           </a:p>
           <a:p>
             <a:pPr lvl="1"/>
             <a:r>
               <a:rPr lang="en-US" dirty="0"/>
-              <a:t>Waiting</a:t>
+              <a:t>User presses inside an item</a:t>
             </a:r>
           </a:p>
           <a:p>
             <a:pPr lvl="2"/>
             <a:r>
               <a:rPr lang="en-US" dirty="0"/>
-              <a:t>Nothing happening</a:t>
+              <a:t>System highlights item</a:t>
             </a:r>
           </a:p>
           <a:p>
             <a:pPr lvl="1"/>
             <a:r>
               <a:rPr lang="en-US" dirty="0"/>
-              <a:t>Choosing</a:t>
+              <a:t>User drags item</a:t>
             </a:r>
           </a:p>
           <a:p>
             <a:pPr lvl="2"/>
             <a:r>
               <a:rPr lang="en-US" dirty="0"/>
-              <a:t>Choosing item type from menu</a:t>
+              <a:t>System shows moving item</a:t>
             </a:r>
           </a:p>
           <a:p>
             <a:pPr lvl="1"/>
             <a:r>
               <a:rPr lang="en-US" dirty="0"/>
-              <a:t>Placing</a:t>
+              <a:t>User releases mouse</a:t>
             </a:r>
           </a:p>
           <a:p>
             <a:pPr lvl="2"/>
             <a:r>
               <a:rPr lang="en-US" dirty="0"/>
-              <a:t>Placing chosen shape</a:t>
-            </a:r>
-          </a:p>
-          <a:p>
-            <a:pPr lvl="1"/>
-            <a:r>
-              <a:rPr lang="en-US" dirty="0"/>
-              <a:t>Moving</a:t>
+              <a:t>System places item at new location</a:t>
             </a:r>
           </a:p>
           <a:p>
             <a:pPr lvl="2"/>
             <a:r>
               <a:rPr lang="en-US" dirty="0"/>
-              <a:t>Moving item to new position</a:t>
-            </a:r>
-          </a:p>
-          <a:p>
-            <a:pPr lvl="1"/>
-            <a:endParaRPr lang="en-US" dirty="0"/>
-          </a:p>
-          <a:p>
-            <a:pPr lvl="1"/>
-            <a:endParaRPr lang="en-US" dirty="0"/>
+              <a:t>System removes item highlighting</a:t>
+            </a:r>
           </a:p>
         </p:txBody>
       </p:sp>
@@ -30753,6 +31407,168 @@
               <a:rPr lang="en-US" smtClean="0"/>
               <a:pPr/>
               <a:t>63</a:t>
+            </a:fld>
+            <a:endParaRPr lang="en-US"/>
+          </a:p>
+        </p:txBody>
+      </p:sp>
+    </p:spTree>
+    <p:extLst>
+      <p:ext uri="{BB962C8B-B14F-4D97-AF65-F5344CB8AC3E}">
+        <p14:creationId xmlns:p14="http://schemas.microsoft.com/office/powerpoint/2010/main" val="4055572376"/>
+      </p:ext>
+    </p:extLst>
+  </p:cSld>
+  <p:clrMapOvr>
+    <a:masterClrMapping/>
+  </p:clrMapOvr>
+</p:sld>
+</file>
+
+<file path=ppt/slides/slide64.xml><?xml version="1.0" encoding="utf-8"?>
+<p:sld xmlns:a="http://schemas.openxmlformats.org/drawingml/2006/main" xmlns:r="http://schemas.openxmlformats.org/officeDocument/2006/relationships" xmlns:p="http://schemas.openxmlformats.org/presentationml/2006/main">
+  <p:cSld>
+    <p:spTree>
+      <p:nvGrpSpPr>
+        <p:cNvPr id="1" name=""/>
+        <p:cNvGrpSpPr/>
+        <p:nvPr/>
+      </p:nvGrpSpPr>
+      <p:grpSpPr>
+        <a:xfrm>
+          <a:off x="0" y="0"/>
+          <a:ext cx="0" cy="0"/>
+          <a:chOff x="0" y="0"/>
+          <a:chExt cx="0" cy="0"/>
+        </a:xfrm>
+      </p:grpSpPr>
+      <p:sp>
+        <p:nvSpPr>
+          <p:cNvPr id="2" name="Title 1"/>
+          <p:cNvSpPr>
+            <a:spLocks noGrp="1"/>
+          </p:cNvSpPr>
+          <p:nvPr>
+            <p:ph type="title"/>
+          </p:nvPr>
+        </p:nvSpPr>
+        <p:spPr/>
+        <p:txBody>
+          <a:bodyPr/>
+          <a:lstStyle/>
+          <a:p>
+            <a:r>
+              <a:rPr lang="en-US" dirty="0"/>
+              <a:t>Room Planner</a:t>
+            </a:r>
+          </a:p>
+        </p:txBody>
+      </p:sp>
+      <p:sp>
+        <p:nvSpPr>
+          <p:cNvPr id="3" name="Content Placeholder 2"/>
+          <p:cNvSpPr>
+            <a:spLocks noGrp="1"/>
+          </p:cNvSpPr>
+          <p:nvPr>
+            <p:ph idx="1"/>
+          </p:nvPr>
+        </p:nvSpPr>
+        <p:spPr/>
+        <p:txBody>
+          <a:bodyPr/>
+          <a:lstStyle/>
+          <a:p>
+            <a:r>
+              <a:rPr lang="en-US" dirty="0"/>
+              <a:t>States:</a:t>
+            </a:r>
+          </a:p>
+          <a:p>
+            <a:pPr lvl="1"/>
+            <a:r>
+              <a:rPr lang="en-US" dirty="0"/>
+              <a:t>Waiting</a:t>
+            </a:r>
+          </a:p>
+          <a:p>
+            <a:pPr lvl="2"/>
+            <a:r>
+              <a:rPr lang="en-US" dirty="0"/>
+              <a:t>Nothing happening</a:t>
+            </a:r>
+          </a:p>
+          <a:p>
+            <a:pPr lvl="1"/>
+            <a:r>
+              <a:rPr lang="en-US" dirty="0"/>
+              <a:t>Choosing</a:t>
+            </a:r>
+          </a:p>
+          <a:p>
+            <a:pPr lvl="2"/>
+            <a:r>
+              <a:rPr lang="en-US" dirty="0"/>
+              <a:t>Choosing item type from menu</a:t>
+            </a:r>
+          </a:p>
+          <a:p>
+            <a:pPr lvl="1"/>
+            <a:r>
+              <a:rPr lang="en-US" dirty="0"/>
+              <a:t>Placing</a:t>
+            </a:r>
+          </a:p>
+          <a:p>
+            <a:pPr lvl="2"/>
+            <a:r>
+              <a:rPr lang="en-US" dirty="0"/>
+              <a:t>Waiting for user to click a location</a:t>
+            </a:r>
+          </a:p>
+          <a:p>
+            <a:pPr lvl="1"/>
+            <a:r>
+              <a:rPr lang="en-US" dirty="0"/>
+              <a:t>Moving</a:t>
+            </a:r>
+          </a:p>
+          <a:p>
+            <a:pPr lvl="2"/>
+            <a:r>
+              <a:rPr lang="en-US" dirty="0"/>
+              <a:t>Moving an item to a new position</a:t>
+            </a:r>
+          </a:p>
+          <a:p>
+            <a:pPr lvl="1"/>
+            <a:endParaRPr lang="en-US" dirty="0"/>
+          </a:p>
+          <a:p>
+            <a:pPr lvl="1"/>
+            <a:endParaRPr lang="en-US" dirty="0"/>
+          </a:p>
+        </p:txBody>
+      </p:sp>
+      <p:sp>
+        <p:nvSpPr>
+          <p:cNvPr id="4" name="Slide Number Placeholder 3"/>
+          <p:cNvSpPr>
+            <a:spLocks noGrp="1"/>
+          </p:cNvSpPr>
+          <p:nvPr>
+            <p:ph type="sldNum" sz="quarter" idx="12"/>
+          </p:nvPr>
+        </p:nvSpPr>
+        <p:spPr/>
+        <p:txBody>
+          <a:bodyPr/>
+          <a:lstStyle/>
+          <a:p>
+            <a:fld id="{CADD82E7-7C10-744D-AD9E-31500693C936}" type="slidenum">
+              <a:rPr lang="en-US" smtClean="0"/>
+              <a:pPr/>
+              <a:t>64</a:t>
             </a:fld>
             <a:endParaRPr lang="en-US"/>
           </a:p>
@@ -30771,7 +31587,7 @@
 </p:sld>
 </file>
 
-<file path=ppt/slides/slide64.xml><?xml version="1.0" encoding="utf-8"?>
+<file path=ppt/slides/slide65.xml><?xml version="1.0" encoding="utf-8"?>
 <p:sld xmlns:a="http://schemas.openxmlformats.org/drawingml/2006/main" xmlns:r="http://schemas.openxmlformats.org/officeDocument/2006/relationships" xmlns:p="http://schemas.openxmlformats.org/presentationml/2006/main">
   <p:cSld>
     <p:spTree>
@@ -30953,7 +31769,7 @@
             <a:fld id="{CADD82E7-7C10-744D-AD9E-31500693C936}" type="slidenum">
               <a:rPr lang="en-US" smtClean="0"/>
               <a:pPr/>
-              <a:t>64</a:t>
+              <a:t>65</a:t>
             </a:fld>
             <a:endParaRPr lang="en-US"/>
           </a:p>
@@ -32600,157 +33416,6 @@
 </p:sld>
 </file>
 
-<file path=ppt/slides/slide65.xml><?xml version="1.0" encoding="utf-8"?>
-<p:sld xmlns:a="http://schemas.openxmlformats.org/drawingml/2006/main" xmlns:r="http://schemas.openxmlformats.org/officeDocument/2006/relationships" xmlns:p="http://schemas.openxmlformats.org/presentationml/2006/main">
-  <p:cSld>
-    <p:spTree>
-      <p:nvGrpSpPr>
-        <p:cNvPr id="1" name=""/>
-        <p:cNvGrpSpPr/>
-        <p:nvPr/>
-      </p:nvGrpSpPr>
-      <p:grpSpPr>
-        <a:xfrm>
-          <a:off x="0" y="0"/>
-          <a:ext cx="0" cy="0"/>
-          <a:chOff x="0" y="0"/>
-          <a:chExt cx="0" cy="0"/>
-        </a:xfrm>
-      </p:grpSpPr>
-      <p:sp>
-        <p:nvSpPr>
-          <p:cNvPr id="2" name="Title 1"/>
-          <p:cNvSpPr>
-            <a:spLocks noGrp="1"/>
-          </p:cNvSpPr>
-          <p:nvPr>
-            <p:ph type="title"/>
-          </p:nvPr>
-        </p:nvSpPr>
-        <p:spPr/>
-        <p:txBody>
-          <a:bodyPr/>
-          <a:lstStyle/>
-          <a:p>
-            <a:r>
-              <a:rPr lang="en-US" dirty="0"/>
-              <a:t>UML State Diagram</a:t>
-            </a:r>
-          </a:p>
-        </p:txBody>
-      </p:sp>
-      <p:sp>
-        <p:nvSpPr>
-          <p:cNvPr id="3" name="Content Placeholder 2"/>
-          <p:cNvSpPr>
-            <a:spLocks noGrp="1"/>
-          </p:cNvSpPr>
-          <p:nvPr>
-            <p:ph idx="1"/>
-          </p:nvPr>
-        </p:nvSpPr>
-        <p:spPr/>
-        <p:txBody>
-          <a:bodyPr/>
-          <a:lstStyle/>
-          <a:p>
-            <a:r>
-              <a:rPr lang="en-US" dirty="0"/>
-              <a:t>Tips:</a:t>
-            </a:r>
-          </a:p>
-          <a:p>
-            <a:pPr lvl="1"/>
-            <a:r>
-              <a:rPr lang="en-US" dirty="0"/>
-              <a:t>Check for completeness</a:t>
-            </a:r>
-          </a:p>
-          <a:p>
-            <a:pPr lvl="2"/>
-            <a:r>
-              <a:rPr lang="en-US" dirty="0"/>
-              <a:t>States reachable?</a:t>
-            </a:r>
-          </a:p>
-          <a:p>
-            <a:pPr lvl="2"/>
-            <a:r>
-              <a:rPr lang="en-US" dirty="0"/>
-              <a:t>Missing transitions?</a:t>
-            </a:r>
-          </a:p>
-          <a:p>
-            <a:pPr lvl="2"/>
-            <a:r>
-              <a:rPr lang="en-US" dirty="0"/>
-              <a:t>Events not considered?</a:t>
-            </a:r>
-          </a:p>
-          <a:p>
-            <a:pPr lvl="2"/>
-            <a:r>
-              <a:rPr lang="en-US" dirty="0"/>
-              <a:t>Unforeseen situations?</a:t>
-            </a:r>
-          </a:p>
-          <a:p>
-            <a:pPr lvl="1"/>
-            <a:r>
-              <a:rPr lang="en-US" dirty="0"/>
-              <a:t>Check for dangerous situations</a:t>
-            </a:r>
-          </a:p>
-          <a:p>
-            <a:pPr lvl="2"/>
-            <a:r>
-              <a:rPr lang="en-US" dirty="0"/>
-              <a:t>E.g., exiting without having saved edits</a:t>
-            </a:r>
-          </a:p>
-          <a:p>
-            <a:pPr lvl="1"/>
-            <a:endParaRPr lang="en-US" dirty="0"/>
-          </a:p>
-        </p:txBody>
-      </p:sp>
-      <p:sp>
-        <p:nvSpPr>
-          <p:cNvPr id="4" name="Slide Number Placeholder 3"/>
-          <p:cNvSpPr>
-            <a:spLocks noGrp="1"/>
-          </p:cNvSpPr>
-          <p:nvPr>
-            <p:ph type="sldNum" sz="quarter" idx="12"/>
-          </p:nvPr>
-        </p:nvSpPr>
-        <p:spPr/>
-        <p:txBody>
-          <a:bodyPr/>
-          <a:lstStyle/>
-          <a:p>
-            <a:fld id="{CADD82E7-7C10-744D-AD9E-31500693C936}" type="slidenum">
-              <a:rPr lang="en-US" smtClean="0"/>
-              <a:pPr/>
-              <a:t>65</a:t>
-            </a:fld>
-            <a:endParaRPr lang="en-US"/>
-          </a:p>
-        </p:txBody>
-      </p:sp>
-    </p:spTree>
-    <p:extLst>
-      <p:ext uri="{BB962C8B-B14F-4D97-AF65-F5344CB8AC3E}">
-        <p14:creationId xmlns:p14="http://schemas.microsoft.com/office/powerpoint/2010/main" val="4234703524"/>
-      </p:ext>
-    </p:extLst>
-  </p:cSld>
-  <p:clrMapOvr>
-    <a:masterClrMapping/>
-  </p:clrMapOvr>
-</p:sld>
-</file>
-
 <file path=ppt/slides/slide66.xml><?xml version="1.0" encoding="utf-8"?>
 <p:sld xmlns:a="http://schemas.openxmlformats.org/drawingml/2006/main" xmlns:r="http://schemas.openxmlformats.org/officeDocument/2006/relationships" xmlns:p="http://schemas.openxmlformats.org/presentationml/2006/main">
   <p:cSld>
@@ -32814,50 +33479,54 @@
             <a:pPr lvl="1"/>
             <a:r>
               <a:rPr lang="en-US" dirty="0"/>
-              <a:t>Check for consistency</a:t>
+              <a:t>Check for completeness</a:t>
             </a:r>
           </a:p>
           <a:p>
             <a:pPr lvl="2"/>
             <a:r>
               <a:rPr lang="en-US" dirty="0"/>
-              <a:t>Similar interactions have similar effects?</a:t>
+              <a:t>States reachable?</a:t>
             </a:r>
           </a:p>
           <a:p>
             <a:pPr lvl="2"/>
             <a:r>
               <a:rPr lang="en-US" dirty="0"/>
-              <a:t>Effects are visible and give good feedback?</a:t>
+              <a:t>Missing transitions?</a:t>
+            </a:r>
+          </a:p>
+          <a:p>
+            <a:pPr lvl="2"/>
+            <a:r>
+              <a:rPr lang="en-US" dirty="0"/>
+              <a:t>Events not considered?</a:t>
+            </a:r>
+          </a:p>
+          <a:p>
+            <a:pPr lvl="2"/>
+            <a:r>
+              <a:rPr lang="en-US" dirty="0"/>
+              <a:t>Unforeseen situations?</a:t>
             </a:r>
           </a:p>
           <a:p>
             <a:pPr lvl="1"/>
             <a:r>
               <a:rPr lang="en-US" dirty="0"/>
-              <a:t>Aid the user</a:t>
+              <a:t>Check for dangerous situations</a:t>
             </a:r>
           </a:p>
           <a:p>
             <a:pPr lvl="2"/>
             <a:r>
               <a:rPr lang="en-US" dirty="0"/>
-              <a:t>Is undo appropriate, in each state?</a:t>
-            </a:r>
-          </a:p>
-          <a:p>
-            <a:pPr lvl="2"/>
-            <a:r>
-              <a:rPr lang="en-US" dirty="0"/>
-              <a:t>Is cancel or escape appropriate?</a:t>
-            </a:r>
-          </a:p>
-          <a:p>
-            <a:pPr lvl="2"/>
-            <a:r>
-              <a:rPr lang="en-US" dirty="0"/>
-              <a:t>Is invoking help appropriate?</a:t>
-            </a:r>
+              <a:t>E.g., exiting without having saved edits</a:t>
+            </a:r>
+          </a:p>
+          <a:p>
+            <a:pPr lvl="1"/>
+            <a:endParaRPr lang="en-US" dirty="0"/>
           </a:p>
         </p:txBody>
       </p:sp>
@@ -32888,7 +33557,7 @@
     </p:spTree>
     <p:extLst>
       <p:ext uri="{BB962C8B-B14F-4D97-AF65-F5344CB8AC3E}">
-        <p14:creationId xmlns:p14="http://schemas.microsoft.com/office/powerpoint/2010/main" val="2685422205"/>
+        <p14:creationId xmlns:p14="http://schemas.microsoft.com/office/powerpoint/2010/main" val="4234703524"/>
       </p:ext>
     </p:extLst>
   </p:cSld>
@@ -32932,7 +33601,7 @@
           <a:p>
             <a:r>
               <a:rPr lang="en-US" dirty="0"/>
-              <a:t>More Information</a:t>
+              <a:t>UML State Diagram</a:t>
             </a:r>
           </a:p>
         </p:txBody>
@@ -32949,82 +33618,61 @@
         </p:nvSpPr>
         <p:spPr/>
         <p:txBody>
-          <a:bodyPr>
-            <a:normAutofit/>
-          </a:bodyPr>
-          <a:lstStyle/>
-          <a:p>
-            <a:r>
-              <a:rPr lang="en-US" dirty="0"/>
-              <a:t>Books:</a:t>
+          <a:bodyPr/>
+          <a:lstStyle/>
+          <a:p>
+            <a:r>
+              <a:rPr lang="en-US" dirty="0"/>
+              <a:t>Tips:</a:t>
             </a:r>
           </a:p>
           <a:p>
             <a:pPr lvl="1"/>
             <a:r>
               <a:rPr lang="en-US" dirty="0"/>
-              <a:t>The Essence of Object-Oriented Programming with Java and UML</a:t>
+              <a:t>Check for consistency</a:t>
             </a:r>
           </a:p>
           <a:p>
             <a:pPr lvl="2"/>
             <a:r>
               <a:rPr lang="en-US" dirty="0"/>
-              <a:t>B. </a:t>
-            </a:r>
-            <a:r>
-              <a:rPr lang="en-US" dirty="0" err="1"/>
-              <a:t>Wampler</a:t>
-            </a:r>
-            <a:endParaRPr lang="en-US" dirty="0"/>
+              <a:t>Similar interactions have similar effects?</a:t>
+            </a:r>
           </a:p>
           <a:p>
             <a:pPr lvl="2"/>
             <a:r>
               <a:rPr lang="en-US" dirty="0"/>
-              <a:t>Addison-Wesley, 2002</a:t>
+              <a:t>Effects are visible and give good feedback?</a:t>
             </a:r>
           </a:p>
           <a:p>
             <a:pPr lvl="1"/>
             <a:r>
               <a:rPr lang="en-US" dirty="0"/>
-              <a:t>UML Distilled</a:t>
+              <a:t>Aid the user</a:t>
             </a:r>
           </a:p>
           <a:p>
             <a:pPr lvl="2"/>
             <a:r>
               <a:rPr lang="en-US" dirty="0"/>
-              <a:t>M. Fowler</a:t>
+              <a:t>Is undo appropriate in each state?</a:t>
             </a:r>
           </a:p>
           <a:p>
             <a:pPr lvl="2"/>
             <a:r>
               <a:rPr lang="en-US" dirty="0"/>
-              <a:t>Addison-Wesley, 2003</a:t>
-            </a:r>
-          </a:p>
-          <a:p>
-            <a:pPr lvl="1"/>
-            <a:r>
-              <a:rPr lang="en-US" dirty="0"/>
-              <a:t>User Stories Applied</a:t>
+              <a:t>Is cancel or escape appropriate?</a:t>
             </a:r>
           </a:p>
           <a:p>
             <a:pPr lvl="2"/>
             <a:r>
               <a:rPr lang="en-US" dirty="0"/>
-              <a:t>M. Cohn</a:t>
-            </a:r>
-          </a:p>
-          <a:p>
-            <a:pPr lvl="2"/>
-            <a:r>
-              <a:rPr lang="en-US" dirty="0"/>
-              <a:t>Addison-Wesley, 2004</a:t>
+              <a:t>Is invoking help appropriate?</a:t>
             </a:r>
           </a:p>
         </p:txBody>
@@ -33044,7 +33692,7 @@
           <a:bodyPr/>
           <a:lstStyle/>
           <a:p>
-            <a:fld id="{D3F25697-57D3-0D49-8FC5-4BE2D6D757CB}" type="slidenum">
+            <a:fld id="{CADD82E7-7C10-744D-AD9E-31500693C936}" type="slidenum">
               <a:rPr lang="en-US" smtClean="0"/>
               <a:pPr/>
               <a:t>67</a:t>
@@ -33056,7 +33704,7 @@
     </p:spTree>
     <p:extLst>
       <p:ext uri="{BB962C8B-B14F-4D97-AF65-F5344CB8AC3E}">
-        <p14:creationId xmlns:p14="http://schemas.microsoft.com/office/powerpoint/2010/main" val="2592314978"/>
+        <p14:creationId xmlns:p14="http://schemas.microsoft.com/office/powerpoint/2010/main" val="2685422205"/>
       </p:ext>
     </p:extLst>
   </p:cSld>
@@ -33085,9 +33733,9 @@
       </p:grpSpPr>
       <p:sp>
         <p:nvSpPr>
-          <p:cNvPr id="411650" name="Rectangle 2"/>
-          <p:cNvSpPr>
-            <a:spLocks noGrp="1" noChangeArrowheads="1"/>
+          <p:cNvPr id="2" name="Title 1"/>
+          <p:cNvSpPr>
+            <a:spLocks noGrp="1"/>
           </p:cNvSpPr>
           <p:nvPr>
             <p:ph type="title"/>
@@ -33107,7 +33755,7 @@
       </p:sp>
       <p:sp>
         <p:nvSpPr>
-          <p:cNvPr id="2" name="Content Placeholder 1"/>
+          <p:cNvPr id="3" name="Content Placeholder 2"/>
           <p:cNvSpPr>
             <a:spLocks noGrp="1"/>
           </p:cNvSpPr>
@@ -33117,89 +33765,103 @@
         </p:nvSpPr>
         <p:spPr/>
         <p:txBody>
+          <a:bodyPr>
+            <a:normAutofit/>
+          </a:bodyPr>
+          <a:lstStyle/>
+          <a:p>
+            <a:r>
+              <a:rPr lang="en-US" dirty="0"/>
+              <a:t>Books:</a:t>
+            </a:r>
+          </a:p>
+          <a:p>
+            <a:pPr lvl="1"/>
+            <a:r>
+              <a:rPr lang="en-US" dirty="0"/>
+              <a:t>The Essence of Object-Oriented Programming with Java and UML</a:t>
+            </a:r>
+          </a:p>
+          <a:p>
+            <a:pPr lvl="2"/>
+            <a:r>
+              <a:rPr lang="en-US" dirty="0"/>
+              <a:t>B. </a:t>
+            </a:r>
+            <a:r>
+              <a:rPr lang="en-US" dirty="0" err="1"/>
+              <a:t>Wampler</a:t>
+            </a:r>
+            <a:endParaRPr lang="en-US" dirty="0"/>
+          </a:p>
+          <a:p>
+            <a:pPr lvl="2"/>
+            <a:r>
+              <a:rPr lang="en-US" dirty="0"/>
+              <a:t>Addison-Wesley, 2002</a:t>
+            </a:r>
+          </a:p>
+          <a:p>
+            <a:pPr lvl="1"/>
+            <a:r>
+              <a:rPr lang="en-US" dirty="0"/>
+              <a:t>UML Distilled</a:t>
+            </a:r>
+          </a:p>
+          <a:p>
+            <a:pPr lvl="2"/>
+            <a:r>
+              <a:rPr lang="en-US" dirty="0"/>
+              <a:t>M. Fowler</a:t>
+            </a:r>
+          </a:p>
+          <a:p>
+            <a:pPr lvl="2"/>
+            <a:r>
+              <a:rPr lang="en-US" dirty="0"/>
+              <a:t>Addison-Wesley, 2003</a:t>
+            </a:r>
+          </a:p>
+          <a:p>
+            <a:pPr lvl="1"/>
+            <a:r>
+              <a:rPr lang="en-US" dirty="0"/>
+              <a:t>User Stories Applied</a:t>
+            </a:r>
+          </a:p>
+          <a:p>
+            <a:pPr lvl="2"/>
+            <a:r>
+              <a:rPr lang="en-US" dirty="0"/>
+              <a:t>M. Cohn</a:t>
+            </a:r>
+          </a:p>
+          <a:p>
+            <a:pPr lvl="2"/>
+            <a:r>
+              <a:rPr lang="en-US" dirty="0"/>
+              <a:t>Addison-Wesley, 2004</a:t>
+            </a:r>
+          </a:p>
+        </p:txBody>
+      </p:sp>
+      <p:sp>
+        <p:nvSpPr>
+          <p:cNvPr id="4" name="Slide Number Placeholder 3"/>
+          <p:cNvSpPr>
+            <a:spLocks noGrp="1"/>
+          </p:cNvSpPr>
+          <p:nvPr>
+            <p:ph type="sldNum" sz="quarter" idx="12"/>
+          </p:nvPr>
+        </p:nvSpPr>
+        <p:spPr/>
+        <p:txBody>
           <a:bodyPr/>
           <a:lstStyle/>
           <a:p>
-            <a:r>
-              <a:rPr lang="en-US" dirty="0"/>
-              <a:t>Books:</a:t>
-            </a:r>
-          </a:p>
-          <a:p>
-            <a:pPr lvl="1"/>
-            <a:r>
-              <a:rPr lang="en-US" dirty="0"/>
-              <a:t>More About Software Requirements</a:t>
-            </a:r>
-          </a:p>
-          <a:p>
-            <a:pPr lvl="2"/>
-            <a:r>
-              <a:rPr lang="en-US" dirty="0"/>
-              <a:t>K. </a:t>
-            </a:r>
-            <a:r>
-              <a:rPr lang="en-US" dirty="0" err="1"/>
-              <a:t>Wiegers</a:t>
-            </a:r>
-            <a:endParaRPr lang="en-US" dirty="0"/>
-          </a:p>
-          <a:p>
-            <a:pPr lvl="2"/>
-            <a:r>
-              <a:rPr lang="en-US" dirty="0"/>
-              <a:t>Microsoft, 2006</a:t>
-            </a:r>
-          </a:p>
-          <a:p>
-            <a:pPr lvl="1"/>
-            <a:r>
-              <a:rPr lang="en-US" dirty="0"/>
-              <a:t>Software Engineering: Theory and Practice</a:t>
-            </a:r>
-          </a:p>
-          <a:p>
-            <a:pPr lvl="2"/>
-            <a:r>
-              <a:rPr lang="en-US" dirty="0"/>
-              <a:t>S.L. </a:t>
-            </a:r>
-            <a:r>
-              <a:rPr lang="en-US" dirty="0" err="1"/>
-              <a:t>Pfleeger</a:t>
-            </a:r>
-            <a:endParaRPr lang="en-US" dirty="0"/>
-          </a:p>
-          <a:p>
-            <a:pPr lvl="2"/>
-            <a:r>
-              <a:rPr lang="en-US" dirty="0"/>
-              <a:t>Prentice-Hall, 2009</a:t>
-            </a:r>
-          </a:p>
-          <a:p>
-            <a:pPr lvl="2"/>
-            <a:endParaRPr lang="en-US" dirty="0"/>
-          </a:p>
-        </p:txBody>
-      </p:sp>
-      <p:sp>
-        <p:nvSpPr>
-          <p:cNvPr id="6" name="Slide Number Placeholder 6"/>
-          <p:cNvSpPr>
-            <a:spLocks noGrp="1"/>
-          </p:cNvSpPr>
-          <p:nvPr>
-            <p:ph type="sldNum" sz="quarter" idx="12"/>
-          </p:nvPr>
-        </p:nvSpPr>
-        <p:spPr/>
-        <p:txBody>
-          <a:bodyPr/>
-          <a:lstStyle/>
-          <a:p>
-            <a:fld id="{614F90F8-B6C2-8C41-90BF-141DEDBC0DBC}" type="slidenum">
-              <a:rPr lang="en-US"/>
+            <a:fld id="{D3F25697-57D3-0D49-8FC5-4BE2D6D757CB}" type="slidenum">
+              <a:rPr lang="en-US" smtClean="0"/>
               <a:pPr/>
               <a:t>68</a:t>
             </a:fld>
@@ -33210,7 +33872,7 @@
     </p:spTree>
     <p:extLst>
       <p:ext uri="{BB962C8B-B14F-4D97-AF65-F5344CB8AC3E}">
-        <p14:creationId xmlns:p14="http://schemas.microsoft.com/office/powerpoint/2010/main" val="266111745"/>
+        <p14:creationId xmlns:p14="http://schemas.microsoft.com/office/powerpoint/2010/main" val="2592314978"/>
       </p:ext>
     </p:extLst>
   </p:cSld>
@@ -33239,12 +33901,34 @@
       </p:grpSpPr>
       <p:sp>
         <p:nvSpPr>
-          <p:cNvPr id="2" name="Title 1"/>
+          <p:cNvPr id="411650" name="Rectangle 2"/>
+          <p:cNvSpPr>
+            <a:spLocks noGrp="1" noChangeArrowheads="1"/>
+          </p:cNvSpPr>
+          <p:nvPr>
+            <p:ph type="title"/>
+          </p:nvPr>
+        </p:nvSpPr>
+        <p:spPr/>
+        <p:txBody>
+          <a:bodyPr/>
+          <a:lstStyle/>
+          <a:p>
+            <a:r>
+              <a:rPr lang="en-US" dirty="0"/>
+              <a:t>More Information</a:t>
+            </a:r>
+          </a:p>
+        </p:txBody>
+      </p:sp>
+      <p:sp>
+        <p:nvSpPr>
+          <p:cNvPr id="2" name="Content Placeholder 1"/>
           <p:cNvSpPr>
             <a:spLocks noGrp="1"/>
           </p:cNvSpPr>
           <p:nvPr>
-            <p:ph type="title"/>
+            <p:ph idx="1"/>
           </p:nvPr>
         </p:nvSpPr>
         <p:spPr/>
@@ -33254,19 +33938,75 @@
           <a:p>
             <a:r>
               <a:rPr lang="en-US" dirty="0"/>
-              <a:t>More Information</a:t>
-            </a:r>
-          </a:p>
-        </p:txBody>
-      </p:sp>
-      <p:sp>
-        <p:nvSpPr>
-          <p:cNvPr id="3" name="Content Placeholder 2"/>
+              <a:t>Books:</a:t>
+            </a:r>
+          </a:p>
+          <a:p>
+            <a:pPr lvl="1"/>
+            <a:r>
+              <a:rPr lang="en-US" dirty="0"/>
+              <a:t>More About Software Requirements</a:t>
+            </a:r>
+          </a:p>
+          <a:p>
+            <a:pPr lvl="2"/>
+            <a:r>
+              <a:rPr lang="en-US" dirty="0"/>
+              <a:t>K. </a:t>
+            </a:r>
+            <a:r>
+              <a:rPr lang="en-US" dirty="0" err="1"/>
+              <a:t>Wiegers</a:t>
+            </a:r>
+            <a:endParaRPr lang="en-US" dirty="0"/>
+          </a:p>
+          <a:p>
+            <a:pPr lvl="2"/>
+            <a:r>
+              <a:rPr lang="en-US" dirty="0"/>
+              <a:t>Microsoft, 2006</a:t>
+            </a:r>
+          </a:p>
+          <a:p>
+            <a:pPr lvl="1"/>
+            <a:r>
+              <a:rPr lang="en-US" dirty="0"/>
+              <a:t>Software Engineering: Theory and Practice</a:t>
+            </a:r>
+          </a:p>
+          <a:p>
+            <a:pPr lvl="2"/>
+            <a:r>
+              <a:rPr lang="en-US" dirty="0"/>
+              <a:t>S.L. </a:t>
+            </a:r>
+            <a:r>
+              <a:rPr lang="en-US" dirty="0" err="1"/>
+              <a:t>Pfleeger</a:t>
+            </a:r>
+            <a:endParaRPr lang="en-US" dirty="0"/>
+          </a:p>
+          <a:p>
+            <a:pPr lvl="2"/>
+            <a:r>
+              <a:rPr lang="en-US" dirty="0"/>
+              <a:t>Prentice-Hall, 2009</a:t>
+            </a:r>
+          </a:p>
+          <a:p>
+            <a:pPr lvl="2"/>
+            <a:endParaRPr lang="en-US" dirty="0"/>
+          </a:p>
+        </p:txBody>
+      </p:sp>
+      <p:sp>
+        <p:nvSpPr>
+          <p:cNvPr id="6" name="Slide Number Placeholder 6"/>
           <p:cNvSpPr>
             <a:spLocks noGrp="1"/>
           </p:cNvSpPr>
           <p:nvPr>
-            <p:ph idx="1"/>
+            <p:ph type="sldNum" sz="quarter" idx="12"/>
           </p:nvPr>
         </p:nvSpPr>
         <p:spPr/>
@@ -33274,50 +34014,8 @@
           <a:bodyPr/>
           <a:lstStyle/>
           <a:p>
-            <a:r>
-              <a:rPr lang="en-US" dirty="0"/>
-              <a:t>Links:</a:t>
-            </a:r>
-          </a:p>
-          <a:p>
-            <a:pPr lvl="1"/>
-            <a:r>
-              <a:rPr lang="en-US" dirty="0"/>
-              <a:t>Effective User Stories for Agile Requirements</a:t>
-            </a:r>
-          </a:p>
-          <a:p>
-            <a:pPr lvl="2"/>
-            <a:r>
-              <a:rPr lang="en-US" dirty="0">
-                <a:hlinkClick r:id="rId2"/>
-              </a:rPr>
-              <a:t>https://www.mountaingoatsoftware.com/presentations/introduction-to-user-stories</a:t>
-            </a:r>
-            <a:r>
-              <a:rPr lang="en-US" dirty="0"/>
-              <a:t> </a:t>
-            </a:r>
-          </a:p>
-        </p:txBody>
-      </p:sp>
-      <p:sp>
-        <p:nvSpPr>
-          <p:cNvPr id="4" name="Slide Number Placeholder 3"/>
-          <p:cNvSpPr>
-            <a:spLocks noGrp="1"/>
-          </p:cNvSpPr>
-          <p:nvPr>
-            <p:ph type="sldNum" sz="quarter" idx="12"/>
-          </p:nvPr>
-        </p:nvSpPr>
-        <p:spPr/>
-        <p:txBody>
-          <a:bodyPr/>
-          <a:lstStyle/>
-          <a:p>
-            <a:fld id="{CADD82E7-7C10-744D-AD9E-31500693C936}" type="slidenum">
-              <a:rPr lang="en-US" smtClean="0"/>
+            <a:fld id="{614F90F8-B6C2-8C41-90BF-141DEDBC0DBC}" type="slidenum">
+              <a:rPr lang="en-US"/>
               <a:pPr/>
               <a:t>69</a:t>
             </a:fld>
@@ -33328,7 +34026,7 @@
     </p:spTree>
     <p:extLst>
       <p:ext uri="{BB962C8B-B14F-4D97-AF65-F5344CB8AC3E}">
-        <p14:creationId xmlns:p14="http://schemas.microsoft.com/office/powerpoint/2010/main" val="47374595"/>
+        <p14:creationId xmlns:p14="http://schemas.microsoft.com/office/powerpoint/2010/main" val="266111745"/>
       </p:ext>
     </p:extLst>
   </p:cSld>
@@ -33494,6 +34192,124 @@
         </p:txBody>
       </p:sp>
     </p:spTree>
+  </p:cSld>
+  <p:clrMapOvr>
+    <a:masterClrMapping/>
+  </p:clrMapOvr>
+</p:sld>
+</file>
+
+<file path=ppt/slides/slide70.xml><?xml version="1.0" encoding="utf-8"?>
+<p:sld xmlns:a="http://schemas.openxmlformats.org/drawingml/2006/main" xmlns:r="http://schemas.openxmlformats.org/officeDocument/2006/relationships" xmlns:p="http://schemas.openxmlformats.org/presentationml/2006/main">
+  <p:cSld>
+    <p:spTree>
+      <p:nvGrpSpPr>
+        <p:cNvPr id="1" name=""/>
+        <p:cNvGrpSpPr/>
+        <p:nvPr/>
+      </p:nvGrpSpPr>
+      <p:grpSpPr>
+        <a:xfrm>
+          <a:off x="0" y="0"/>
+          <a:ext cx="0" cy="0"/>
+          <a:chOff x="0" y="0"/>
+          <a:chExt cx="0" cy="0"/>
+        </a:xfrm>
+      </p:grpSpPr>
+      <p:sp>
+        <p:nvSpPr>
+          <p:cNvPr id="2" name="Title 1"/>
+          <p:cNvSpPr>
+            <a:spLocks noGrp="1"/>
+          </p:cNvSpPr>
+          <p:nvPr>
+            <p:ph type="title"/>
+          </p:nvPr>
+        </p:nvSpPr>
+        <p:spPr/>
+        <p:txBody>
+          <a:bodyPr/>
+          <a:lstStyle/>
+          <a:p>
+            <a:r>
+              <a:rPr lang="en-US" dirty="0"/>
+              <a:t>More Information</a:t>
+            </a:r>
+          </a:p>
+        </p:txBody>
+      </p:sp>
+      <p:sp>
+        <p:nvSpPr>
+          <p:cNvPr id="3" name="Content Placeholder 2"/>
+          <p:cNvSpPr>
+            <a:spLocks noGrp="1"/>
+          </p:cNvSpPr>
+          <p:nvPr>
+            <p:ph idx="1"/>
+          </p:nvPr>
+        </p:nvSpPr>
+        <p:spPr/>
+        <p:txBody>
+          <a:bodyPr/>
+          <a:lstStyle/>
+          <a:p>
+            <a:r>
+              <a:rPr lang="en-US" dirty="0"/>
+              <a:t>Links:</a:t>
+            </a:r>
+          </a:p>
+          <a:p>
+            <a:pPr lvl="1"/>
+            <a:r>
+              <a:rPr lang="en-US" dirty="0"/>
+              <a:t>Effective User Stories for Agile Requirements</a:t>
+            </a:r>
+          </a:p>
+          <a:p>
+            <a:pPr lvl="2"/>
+            <a:r>
+              <a:rPr lang="en-US" dirty="0">
+                <a:hlinkClick r:id="rId2"/>
+              </a:rPr>
+              <a:t>https://www.mountaingoatsoftware.com/presentations/introduction-to-user-stories</a:t>
+            </a:r>
+            <a:r>
+              <a:rPr lang="en-US" dirty="0"/>
+              <a:t> </a:t>
+            </a:r>
+          </a:p>
+        </p:txBody>
+      </p:sp>
+      <p:sp>
+        <p:nvSpPr>
+          <p:cNvPr id="4" name="Slide Number Placeholder 3"/>
+          <p:cNvSpPr>
+            <a:spLocks noGrp="1"/>
+          </p:cNvSpPr>
+          <p:nvPr>
+            <p:ph type="sldNum" sz="quarter" idx="12"/>
+          </p:nvPr>
+        </p:nvSpPr>
+        <p:spPr/>
+        <p:txBody>
+          <a:bodyPr/>
+          <a:lstStyle/>
+          <a:p>
+            <a:fld id="{CADD82E7-7C10-744D-AD9E-31500693C936}" type="slidenum">
+              <a:rPr lang="en-US" smtClean="0"/>
+              <a:pPr/>
+              <a:t>70</a:t>
+            </a:fld>
+            <a:endParaRPr lang="en-US"/>
+          </a:p>
+        </p:txBody>
+      </p:sp>
+    </p:spTree>
+    <p:extLst>
+      <p:ext uri="{BB962C8B-B14F-4D97-AF65-F5344CB8AC3E}">
+        <p14:creationId xmlns:p14="http://schemas.microsoft.com/office/powerpoint/2010/main" val="47374595"/>
+      </p:ext>
+    </p:extLst>
   </p:cSld>
   <p:clrMapOvr>
     <a:masterClrMapping/>
